--- a/tests/Lokad.OoxPdf.Tests/Cases/pptx-shapes.pptx
+++ b/tests/Lokad.OoxPdf.Tests/Cases/pptx-shapes.pptx
@@ -129,7 +129,7 @@
           <p:cNvPr id="2" name="Title 1">
             <a:extLst>
               <a:ext uri="{FF2B5EF4-FFF2-40B4-BE49-F238E27FC236}">
-                <a16:creationId xmlns:a16="http://schemas.microsoft.com/office/drawing/2014/main" id="{5489F4D8-35F2-5D39-3D0B-F4E52B186031}"/>
+                <a16:creationId xmlns:a16="http://schemas.microsoft.com/office/drawing/2014/main" id="{93155783-9733-6D15-87F3-DE2E956D4B4F}"/>
               </a:ext>
             </a:extLst>
           </p:cNvPr>
@@ -166,7 +166,7 @@
           <p:cNvPr id="3" name="Subtitle 2">
             <a:extLst>
               <a:ext uri="{FF2B5EF4-FFF2-40B4-BE49-F238E27FC236}">
-                <a16:creationId xmlns:a16="http://schemas.microsoft.com/office/drawing/2014/main" id="{882CAB57-EF8C-D4C0-879D-D16DDA383EC1}"/>
+                <a16:creationId xmlns:a16="http://schemas.microsoft.com/office/drawing/2014/main" id="{B98D22D2-6948-9180-48BF-D300BF940F8D}"/>
               </a:ext>
             </a:extLst>
           </p:cNvPr>
@@ -236,7 +236,7 @@
           <p:cNvPr id="4" name="Date Placeholder 3">
             <a:extLst>
               <a:ext uri="{FF2B5EF4-FFF2-40B4-BE49-F238E27FC236}">
-                <a16:creationId xmlns:a16="http://schemas.microsoft.com/office/drawing/2014/main" id="{98904A16-218F-CEB0-EC0F-5D7AE41781D8}"/>
+                <a16:creationId xmlns:a16="http://schemas.microsoft.com/office/drawing/2014/main" id="{20528541-929E-29B8-8E8F-B5A70ABA971C}"/>
               </a:ext>
             </a:extLst>
           </p:cNvPr>
@@ -252,7 +252,7 @@
           <a:bodyPr/>
           <a:lstStyle/>
           <a:p>
-            <a:fld id="{7DF1436A-1E1C-4383-9E61-1EE8881AACAC}" type="datetimeFigureOut">
+            <a:fld id="{4E4EC354-D508-484A-8B66-80171810EB59}" type="datetimeFigureOut">
               <a:rPr lang="en-US" smtClean="0"/>
               <a:t>5/14/2026</a:t>
             </a:fld>
@@ -265,7 +265,7 @@
           <p:cNvPr id="5" name="Footer Placeholder 4">
             <a:extLst>
               <a:ext uri="{FF2B5EF4-FFF2-40B4-BE49-F238E27FC236}">
-                <a16:creationId xmlns:a16="http://schemas.microsoft.com/office/drawing/2014/main" id="{A4D10590-57B2-607D-8169-E7314E06A3FC}"/>
+                <a16:creationId xmlns:a16="http://schemas.microsoft.com/office/drawing/2014/main" id="{45C0A707-7961-8292-B920-D0F2D77F5E54}"/>
               </a:ext>
             </a:extLst>
           </p:cNvPr>
@@ -290,7 +290,7 @@
           <p:cNvPr id="6" name="Slide Number Placeholder 5">
             <a:extLst>
               <a:ext uri="{FF2B5EF4-FFF2-40B4-BE49-F238E27FC236}">
-                <a16:creationId xmlns:a16="http://schemas.microsoft.com/office/drawing/2014/main" id="{1769B222-C0D2-2234-F21E-F449A1A22F2B}"/>
+                <a16:creationId xmlns:a16="http://schemas.microsoft.com/office/drawing/2014/main" id="{1BE38E05-E0D6-2526-0485-CA3A050E8A7B}"/>
               </a:ext>
             </a:extLst>
           </p:cNvPr>
@@ -306,7 +306,7 @@
           <a:bodyPr/>
           <a:lstStyle/>
           <a:p>
-            <a:fld id="{FD46D3FB-4AB5-428B-AF3F-D4DE3466D970}" type="slidenum">
+            <a:fld id="{F4E5DC8E-D136-45D7-A9C1-2A7416A8FD7F}" type="slidenum">
               <a:rPr lang="en-US" smtClean="0"/>
               <a:t>‹#›</a:t>
             </a:fld>
@@ -317,7 +317,7 @@
     </p:spTree>
     <p:extLst>
       <p:ext uri="{BB962C8B-B14F-4D97-AF65-F5344CB8AC3E}">
-        <p14:creationId xmlns:p14="http://schemas.microsoft.com/office/powerpoint/2010/main" val="3799175445"/>
+        <p14:creationId xmlns:p14="http://schemas.microsoft.com/office/powerpoint/2010/main" val="840213909"/>
       </p:ext>
     </p:extLst>
   </p:cSld>
@@ -349,7 +349,7 @@
           <p:cNvPr id="2" name="Title 1">
             <a:extLst>
               <a:ext uri="{FF2B5EF4-FFF2-40B4-BE49-F238E27FC236}">
-                <a16:creationId xmlns:a16="http://schemas.microsoft.com/office/drawing/2014/main" id="{8F3B5338-37C3-F5F5-1967-C3BFFC8D4262}"/>
+                <a16:creationId xmlns:a16="http://schemas.microsoft.com/office/drawing/2014/main" id="{4759887E-FB9D-F313-1968-2973479242DA}"/>
               </a:ext>
             </a:extLst>
           </p:cNvPr>
@@ -377,7 +377,7 @@
           <p:cNvPr id="3" name="Vertical Text Placeholder 2">
             <a:extLst>
               <a:ext uri="{FF2B5EF4-FFF2-40B4-BE49-F238E27FC236}">
-                <a16:creationId xmlns:a16="http://schemas.microsoft.com/office/drawing/2014/main" id="{8ACBBFC5-0021-F554-9C61-217F42B33A30}"/>
+                <a16:creationId xmlns:a16="http://schemas.microsoft.com/office/drawing/2014/main" id="{2950485A-6A41-9160-9200-C2FAAD5F1EED}"/>
               </a:ext>
             </a:extLst>
           </p:cNvPr>
@@ -434,7 +434,7 @@
           <p:cNvPr id="4" name="Date Placeholder 3">
             <a:extLst>
               <a:ext uri="{FF2B5EF4-FFF2-40B4-BE49-F238E27FC236}">
-                <a16:creationId xmlns:a16="http://schemas.microsoft.com/office/drawing/2014/main" id="{5AB3BC7D-01D8-2221-BE08-855AF3CDBCF5}"/>
+                <a16:creationId xmlns:a16="http://schemas.microsoft.com/office/drawing/2014/main" id="{5DA34F83-FE5D-CDBD-3B70-635070DD87FF}"/>
               </a:ext>
             </a:extLst>
           </p:cNvPr>
@@ -450,7 +450,7 @@
           <a:bodyPr/>
           <a:lstStyle/>
           <a:p>
-            <a:fld id="{7DF1436A-1E1C-4383-9E61-1EE8881AACAC}" type="datetimeFigureOut">
+            <a:fld id="{4E4EC354-D508-484A-8B66-80171810EB59}" type="datetimeFigureOut">
               <a:rPr lang="en-US" smtClean="0"/>
               <a:t>5/14/2026</a:t>
             </a:fld>
@@ -463,7 +463,7 @@
           <p:cNvPr id="5" name="Footer Placeholder 4">
             <a:extLst>
               <a:ext uri="{FF2B5EF4-FFF2-40B4-BE49-F238E27FC236}">
-                <a16:creationId xmlns:a16="http://schemas.microsoft.com/office/drawing/2014/main" id="{274B73F1-7E75-0F24-3C39-ED82171A5B7B}"/>
+                <a16:creationId xmlns:a16="http://schemas.microsoft.com/office/drawing/2014/main" id="{CC0BD521-0072-F923-5532-063FA379F453}"/>
               </a:ext>
             </a:extLst>
           </p:cNvPr>
@@ -488,7 +488,7 @@
           <p:cNvPr id="6" name="Slide Number Placeholder 5">
             <a:extLst>
               <a:ext uri="{FF2B5EF4-FFF2-40B4-BE49-F238E27FC236}">
-                <a16:creationId xmlns:a16="http://schemas.microsoft.com/office/drawing/2014/main" id="{C5C5FA29-B6E0-6C2C-91AD-83F1E83216C1}"/>
+                <a16:creationId xmlns:a16="http://schemas.microsoft.com/office/drawing/2014/main" id="{B1FD004A-8EB7-41A0-378C-2B91A7B16CB5}"/>
               </a:ext>
             </a:extLst>
           </p:cNvPr>
@@ -504,7 +504,7 @@
           <a:bodyPr/>
           <a:lstStyle/>
           <a:p>
-            <a:fld id="{FD46D3FB-4AB5-428B-AF3F-D4DE3466D970}" type="slidenum">
+            <a:fld id="{F4E5DC8E-D136-45D7-A9C1-2A7416A8FD7F}" type="slidenum">
               <a:rPr lang="en-US" smtClean="0"/>
               <a:t>‹#›</a:t>
             </a:fld>
@@ -515,7 +515,7 @@
     </p:spTree>
     <p:extLst>
       <p:ext uri="{BB962C8B-B14F-4D97-AF65-F5344CB8AC3E}">
-        <p14:creationId xmlns:p14="http://schemas.microsoft.com/office/powerpoint/2010/main" val="651186686"/>
+        <p14:creationId xmlns:p14="http://schemas.microsoft.com/office/powerpoint/2010/main" val="2578940274"/>
       </p:ext>
     </p:extLst>
   </p:cSld>
@@ -547,7 +547,7 @@
           <p:cNvPr id="2" name="Vertical Title 1">
             <a:extLst>
               <a:ext uri="{FF2B5EF4-FFF2-40B4-BE49-F238E27FC236}">
-                <a16:creationId xmlns:a16="http://schemas.microsoft.com/office/drawing/2014/main" id="{93274019-7A9C-C50C-3150-B0451E3583B4}"/>
+                <a16:creationId xmlns:a16="http://schemas.microsoft.com/office/drawing/2014/main" id="{B1864460-0E6E-5C3D-524C-6B3539E0F8F5}"/>
               </a:ext>
             </a:extLst>
           </p:cNvPr>
@@ -580,7 +580,7 @@
           <p:cNvPr id="3" name="Vertical Text Placeholder 2">
             <a:extLst>
               <a:ext uri="{FF2B5EF4-FFF2-40B4-BE49-F238E27FC236}">
-                <a16:creationId xmlns:a16="http://schemas.microsoft.com/office/drawing/2014/main" id="{5764DD2E-D1F9-AC0B-5EDD-178F34BEB491}"/>
+                <a16:creationId xmlns:a16="http://schemas.microsoft.com/office/drawing/2014/main" id="{8543F904-8107-06E5-5B7A-528ADB63D711}"/>
               </a:ext>
             </a:extLst>
           </p:cNvPr>
@@ -642,7 +642,7 @@
           <p:cNvPr id="4" name="Date Placeholder 3">
             <a:extLst>
               <a:ext uri="{FF2B5EF4-FFF2-40B4-BE49-F238E27FC236}">
-                <a16:creationId xmlns:a16="http://schemas.microsoft.com/office/drawing/2014/main" id="{4F750EBB-EE19-75C0-651E-124FF20568B4}"/>
+                <a16:creationId xmlns:a16="http://schemas.microsoft.com/office/drawing/2014/main" id="{234E10F8-0A6E-71C3-0C72-B6898FB7815F}"/>
               </a:ext>
             </a:extLst>
           </p:cNvPr>
@@ -658,7 +658,7 @@
           <a:bodyPr/>
           <a:lstStyle/>
           <a:p>
-            <a:fld id="{7DF1436A-1E1C-4383-9E61-1EE8881AACAC}" type="datetimeFigureOut">
+            <a:fld id="{4E4EC354-D508-484A-8B66-80171810EB59}" type="datetimeFigureOut">
               <a:rPr lang="en-US" smtClean="0"/>
               <a:t>5/14/2026</a:t>
             </a:fld>
@@ -671,7 +671,7 @@
           <p:cNvPr id="5" name="Footer Placeholder 4">
             <a:extLst>
               <a:ext uri="{FF2B5EF4-FFF2-40B4-BE49-F238E27FC236}">
-                <a16:creationId xmlns:a16="http://schemas.microsoft.com/office/drawing/2014/main" id="{3F6C3500-FC5F-3FD1-7040-B5176D31101C}"/>
+                <a16:creationId xmlns:a16="http://schemas.microsoft.com/office/drawing/2014/main" id="{26BA3A69-8490-3107-CE12-1514D85ADBCB}"/>
               </a:ext>
             </a:extLst>
           </p:cNvPr>
@@ -696,7 +696,7 @@
           <p:cNvPr id="6" name="Slide Number Placeholder 5">
             <a:extLst>
               <a:ext uri="{FF2B5EF4-FFF2-40B4-BE49-F238E27FC236}">
-                <a16:creationId xmlns:a16="http://schemas.microsoft.com/office/drawing/2014/main" id="{2C30CA48-019D-C79D-13A9-9B14E93E8AFF}"/>
+                <a16:creationId xmlns:a16="http://schemas.microsoft.com/office/drawing/2014/main" id="{33E9BD07-7F25-FF53-71AA-6AFA06EABFCA}"/>
               </a:ext>
             </a:extLst>
           </p:cNvPr>
@@ -712,7 +712,7 @@
           <a:bodyPr/>
           <a:lstStyle/>
           <a:p>
-            <a:fld id="{FD46D3FB-4AB5-428B-AF3F-D4DE3466D970}" type="slidenum">
+            <a:fld id="{F4E5DC8E-D136-45D7-A9C1-2A7416A8FD7F}" type="slidenum">
               <a:rPr lang="en-US" smtClean="0"/>
               <a:t>‹#›</a:t>
             </a:fld>
@@ -723,7 +723,7 @@
     </p:spTree>
     <p:extLst>
       <p:ext uri="{BB962C8B-B14F-4D97-AF65-F5344CB8AC3E}">
-        <p14:creationId xmlns:p14="http://schemas.microsoft.com/office/powerpoint/2010/main" val="3748010076"/>
+        <p14:creationId xmlns:p14="http://schemas.microsoft.com/office/powerpoint/2010/main" val="2976460559"/>
       </p:ext>
     </p:extLst>
   </p:cSld>
@@ -755,7 +755,7 @@
           <p:cNvPr id="2" name="Title 1">
             <a:extLst>
               <a:ext uri="{FF2B5EF4-FFF2-40B4-BE49-F238E27FC236}">
-                <a16:creationId xmlns:a16="http://schemas.microsoft.com/office/drawing/2014/main" id="{17FB0187-1902-0C8C-1FBE-500E5C4A5BA2}"/>
+                <a16:creationId xmlns:a16="http://schemas.microsoft.com/office/drawing/2014/main" id="{6382C9B1-2A18-0F50-D57C-AD7D344EE25F}"/>
               </a:ext>
             </a:extLst>
           </p:cNvPr>
@@ -783,7 +783,7 @@
           <p:cNvPr id="3" name="Content Placeholder 2">
             <a:extLst>
               <a:ext uri="{FF2B5EF4-FFF2-40B4-BE49-F238E27FC236}">
-                <a16:creationId xmlns:a16="http://schemas.microsoft.com/office/drawing/2014/main" id="{925EAFEB-9ADA-7FF9-1D53-C3CA0B7B5F1A}"/>
+                <a16:creationId xmlns:a16="http://schemas.microsoft.com/office/drawing/2014/main" id="{83C1E780-3AE5-6E3C-8DD6-9C3417884B45}"/>
               </a:ext>
             </a:extLst>
           </p:cNvPr>
@@ -840,7 +840,7 @@
           <p:cNvPr id="4" name="Date Placeholder 3">
             <a:extLst>
               <a:ext uri="{FF2B5EF4-FFF2-40B4-BE49-F238E27FC236}">
-                <a16:creationId xmlns:a16="http://schemas.microsoft.com/office/drawing/2014/main" id="{8D36FE72-8D03-A26F-D45F-879AF68F4949}"/>
+                <a16:creationId xmlns:a16="http://schemas.microsoft.com/office/drawing/2014/main" id="{51B7B163-903B-472F-1E5B-67B2549C92E0}"/>
               </a:ext>
             </a:extLst>
           </p:cNvPr>
@@ -856,7 +856,7 @@
           <a:bodyPr/>
           <a:lstStyle/>
           <a:p>
-            <a:fld id="{7DF1436A-1E1C-4383-9E61-1EE8881AACAC}" type="datetimeFigureOut">
+            <a:fld id="{4E4EC354-D508-484A-8B66-80171810EB59}" type="datetimeFigureOut">
               <a:rPr lang="en-US" smtClean="0"/>
               <a:t>5/14/2026</a:t>
             </a:fld>
@@ -869,7 +869,7 @@
           <p:cNvPr id="5" name="Footer Placeholder 4">
             <a:extLst>
               <a:ext uri="{FF2B5EF4-FFF2-40B4-BE49-F238E27FC236}">
-                <a16:creationId xmlns:a16="http://schemas.microsoft.com/office/drawing/2014/main" id="{3E012CFE-40DE-E37A-DA89-F18AB45D30EF}"/>
+                <a16:creationId xmlns:a16="http://schemas.microsoft.com/office/drawing/2014/main" id="{8FF7ED2E-26FE-E8E1-F9E1-C238407C235B}"/>
               </a:ext>
             </a:extLst>
           </p:cNvPr>
@@ -894,7 +894,7 @@
           <p:cNvPr id="6" name="Slide Number Placeholder 5">
             <a:extLst>
               <a:ext uri="{FF2B5EF4-FFF2-40B4-BE49-F238E27FC236}">
-                <a16:creationId xmlns:a16="http://schemas.microsoft.com/office/drawing/2014/main" id="{4B7CC332-AD13-AF9D-FC36-228F4798C7DB}"/>
+                <a16:creationId xmlns:a16="http://schemas.microsoft.com/office/drawing/2014/main" id="{DC303D89-EA5E-0A8E-5C23-2FBD586C6025}"/>
               </a:ext>
             </a:extLst>
           </p:cNvPr>
@@ -910,7 +910,7 @@
           <a:bodyPr/>
           <a:lstStyle/>
           <a:p>
-            <a:fld id="{FD46D3FB-4AB5-428B-AF3F-D4DE3466D970}" type="slidenum">
+            <a:fld id="{F4E5DC8E-D136-45D7-A9C1-2A7416A8FD7F}" type="slidenum">
               <a:rPr lang="en-US" smtClean="0"/>
               <a:t>‹#›</a:t>
             </a:fld>
@@ -921,7 +921,7 @@
     </p:spTree>
     <p:extLst>
       <p:ext uri="{BB962C8B-B14F-4D97-AF65-F5344CB8AC3E}">
-        <p14:creationId xmlns:p14="http://schemas.microsoft.com/office/powerpoint/2010/main" val="4244473486"/>
+        <p14:creationId xmlns:p14="http://schemas.microsoft.com/office/powerpoint/2010/main" val="2535058859"/>
       </p:ext>
     </p:extLst>
   </p:cSld>
@@ -953,7 +953,7 @@
           <p:cNvPr id="2" name="Title 1">
             <a:extLst>
               <a:ext uri="{FF2B5EF4-FFF2-40B4-BE49-F238E27FC236}">
-                <a16:creationId xmlns:a16="http://schemas.microsoft.com/office/drawing/2014/main" id="{7F56D60D-FEA5-7B2B-4FD5-93B0791EAC69}"/>
+                <a16:creationId xmlns:a16="http://schemas.microsoft.com/office/drawing/2014/main" id="{D796836A-90FB-4CF8-A1BB-2B5CCDE063B9}"/>
               </a:ext>
             </a:extLst>
           </p:cNvPr>
@@ -990,7 +990,7 @@
           <p:cNvPr id="3" name="Text Placeholder 2">
             <a:extLst>
               <a:ext uri="{FF2B5EF4-FFF2-40B4-BE49-F238E27FC236}">
-                <a16:creationId xmlns:a16="http://schemas.microsoft.com/office/drawing/2014/main" id="{9AD7C4AC-C0CD-FA75-F1F9-766260CDD729}"/>
+                <a16:creationId xmlns:a16="http://schemas.microsoft.com/office/drawing/2014/main" id="{F2331C5E-8901-BEB9-8E90-DFD598584EF8}"/>
               </a:ext>
             </a:extLst>
           </p:cNvPr>
@@ -1115,7 +1115,7 @@
           <p:cNvPr id="4" name="Date Placeholder 3">
             <a:extLst>
               <a:ext uri="{FF2B5EF4-FFF2-40B4-BE49-F238E27FC236}">
-                <a16:creationId xmlns:a16="http://schemas.microsoft.com/office/drawing/2014/main" id="{36A9D17A-493F-60CA-F413-B723044D88C9}"/>
+                <a16:creationId xmlns:a16="http://schemas.microsoft.com/office/drawing/2014/main" id="{0C2EF1D8-800A-6F19-AEF6-0472C2555482}"/>
               </a:ext>
             </a:extLst>
           </p:cNvPr>
@@ -1131,7 +1131,7 @@
           <a:bodyPr/>
           <a:lstStyle/>
           <a:p>
-            <a:fld id="{7DF1436A-1E1C-4383-9E61-1EE8881AACAC}" type="datetimeFigureOut">
+            <a:fld id="{4E4EC354-D508-484A-8B66-80171810EB59}" type="datetimeFigureOut">
               <a:rPr lang="en-US" smtClean="0"/>
               <a:t>5/14/2026</a:t>
             </a:fld>
@@ -1144,7 +1144,7 @@
           <p:cNvPr id="5" name="Footer Placeholder 4">
             <a:extLst>
               <a:ext uri="{FF2B5EF4-FFF2-40B4-BE49-F238E27FC236}">
-                <a16:creationId xmlns:a16="http://schemas.microsoft.com/office/drawing/2014/main" id="{F40528AB-66BF-057B-70DE-058A6CCF62E7}"/>
+                <a16:creationId xmlns:a16="http://schemas.microsoft.com/office/drawing/2014/main" id="{9E0B6002-6E64-81A9-3363-FDF972CB576E}"/>
               </a:ext>
             </a:extLst>
           </p:cNvPr>
@@ -1169,7 +1169,7 @@
           <p:cNvPr id="6" name="Slide Number Placeholder 5">
             <a:extLst>
               <a:ext uri="{FF2B5EF4-FFF2-40B4-BE49-F238E27FC236}">
-                <a16:creationId xmlns:a16="http://schemas.microsoft.com/office/drawing/2014/main" id="{A08D233F-DA16-2119-F51C-6F3122D61912}"/>
+                <a16:creationId xmlns:a16="http://schemas.microsoft.com/office/drawing/2014/main" id="{4374C19B-D852-055C-3AEC-6213F3D5E9A8}"/>
               </a:ext>
             </a:extLst>
           </p:cNvPr>
@@ -1185,7 +1185,7 @@
           <a:bodyPr/>
           <a:lstStyle/>
           <a:p>
-            <a:fld id="{FD46D3FB-4AB5-428B-AF3F-D4DE3466D970}" type="slidenum">
+            <a:fld id="{F4E5DC8E-D136-45D7-A9C1-2A7416A8FD7F}" type="slidenum">
               <a:rPr lang="en-US" smtClean="0"/>
               <a:t>‹#›</a:t>
             </a:fld>
@@ -1196,7 +1196,7 @@
     </p:spTree>
     <p:extLst>
       <p:ext uri="{BB962C8B-B14F-4D97-AF65-F5344CB8AC3E}">
-        <p14:creationId xmlns:p14="http://schemas.microsoft.com/office/powerpoint/2010/main" val="2317968490"/>
+        <p14:creationId xmlns:p14="http://schemas.microsoft.com/office/powerpoint/2010/main" val="1176613558"/>
       </p:ext>
     </p:extLst>
   </p:cSld>
@@ -1228,7 +1228,7 @@
           <p:cNvPr id="2" name="Title 1">
             <a:extLst>
               <a:ext uri="{FF2B5EF4-FFF2-40B4-BE49-F238E27FC236}">
-                <a16:creationId xmlns:a16="http://schemas.microsoft.com/office/drawing/2014/main" id="{4BB6730B-DDD5-37F3-23E1-46AFAFC79E8F}"/>
+                <a16:creationId xmlns:a16="http://schemas.microsoft.com/office/drawing/2014/main" id="{A70E52C3-7FA3-18BF-891A-9CEAAADBB639}"/>
               </a:ext>
             </a:extLst>
           </p:cNvPr>
@@ -1256,7 +1256,7 @@
           <p:cNvPr id="3" name="Content Placeholder 2">
             <a:extLst>
               <a:ext uri="{FF2B5EF4-FFF2-40B4-BE49-F238E27FC236}">
-                <a16:creationId xmlns:a16="http://schemas.microsoft.com/office/drawing/2014/main" id="{C1602133-8E5A-44F2-84DB-494E51BA3DF8}"/>
+                <a16:creationId xmlns:a16="http://schemas.microsoft.com/office/drawing/2014/main" id="{85549A37-4C01-14AA-BB72-8C513E5EE356}"/>
               </a:ext>
             </a:extLst>
           </p:cNvPr>
@@ -1318,7 +1318,7 @@
           <p:cNvPr id="4" name="Content Placeholder 3">
             <a:extLst>
               <a:ext uri="{FF2B5EF4-FFF2-40B4-BE49-F238E27FC236}">
-                <a16:creationId xmlns:a16="http://schemas.microsoft.com/office/drawing/2014/main" id="{B9C006F0-9578-9519-8012-5B19B8F23B6C}"/>
+                <a16:creationId xmlns:a16="http://schemas.microsoft.com/office/drawing/2014/main" id="{230A10B5-5ADB-5C54-5EBC-20A6F6597565}"/>
               </a:ext>
             </a:extLst>
           </p:cNvPr>
@@ -1380,7 +1380,7 @@
           <p:cNvPr id="5" name="Date Placeholder 4">
             <a:extLst>
               <a:ext uri="{FF2B5EF4-FFF2-40B4-BE49-F238E27FC236}">
-                <a16:creationId xmlns:a16="http://schemas.microsoft.com/office/drawing/2014/main" id="{A5C2139D-9687-CCC5-AF61-C6E0DA01E27B}"/>
+                <a16:creationId xmlns:a16="http://schemas.microsoft.com/office/drawing/2014/main" id="{042410F1-CD8D-A771-00EC-45ABA9D92921}"/>
               </a:ext>
             </a:extLst>
           </p:cNvPr>
@@ -1396,7 +1396,7 @@
           <a:bodyPr/>
           <a:lstStyle/>
           <a:p>
-            <a:fld id="{7DF1436A-1E1C-4383-9E61-1EE8881AACAC}" type="datetimeFigureOut">
+            <a:fld id="{4E4EC354-D508-484A-8B66-80171810EB59}" type="datetimeFigureOut">
               <a:rPr lang="en-US" smtClean="0"/>
               <a:t>5/14/2026</a:t>
             </a:fld>
@@ -1409,7 +1409,7 @@
           <p:cNvPr id="6" name="Footer Placeholder 5">
             <a:extLst>
               <a:ext uri="{FF2B5EF4-FFF2-40B4-BE49-F238E27FC236}">
-                <a16:creationId xmlns:a16="http://schemas.microsoft.com/office/drawing/2014/main" id="{E548EFB5-F425-4101-AF7C-9B4D3A0AAD4F}"/>
+                <a16:creationId xmlns:a16="http://schemas.microsoft.com/office/drawing/2014/main" id="{37B1CA09-1FB5-09C4-122D-AB52D314A0F2}"/>
               </a:ext>
             </a:extLst>
           </p:cNvPr>
@@ -1434,7 +1434,7 @@
           <p:cNvPr id="7" name="Slide Number Placeholder 6">
             <a:extLst>
               <a:ext uri="{FF2B5EF4-FFF2-40B4-BE49-F238E27FC236}">
-                <a16:creationId xmlns:a16="http://schemas.microsoft.com/office/drawing/2014/main" id="{754F4C4B-DD64-9431-A660-9096C458BBDA}"/>
+                <a16:creationId xmlns:a16="http://schemas.microsoft.com/office/drawing/2014/main" id="{7B290F36-948D-BDF7-056A-0C7B17E6FE7D}"/>
               </a:ext>
             </a:extLst>
           </p:cNvPr>
@@ -1450,7 +1450,7 @@
           <a:bodyPr/>
           <a:lstStyle/>
           <a:p>
-            <a:fld id="{FD46D3FB-4AB5-428B-AF3F-D4DE3466D970}" type="slidenum">
+            <a:fld id="{F4E5DC8E-D136-45D7-A9C1-2A7416A8FD7F}" type="slidenum">
               <a:rPr lang="en-US" smtClean="0"/>
               <a:t>‹#›</a:t>
             </a:fld>
@@ -1461,7 +1461,7 @@
     </p:spTree>
     <p:extLst>
       <p:ext uri="{BB962C8B-B14F-4D97-AF65-F5344CB8AC3E}">
-        <p14:creationId xmlns:p14="http://schemas.microsoft.com/office/powerpoint/2010/main" val="442659400"/>
+        <p14:creationId xmlns:p14="http://schemas.microsoft.com/office/powerpoint/2010/main" val="1492155531"/>
       </p:ext>
     </p:extLst>
   </p:cSld>
@@ -1493,7 +1493,7 @@
           <p:cNvPr id="2" name="Title 1">
             <a:extLst>
               <a:ext uri="{FF2B5EF4-FFF2-40B4-BE49-F238E27FC236}">
-                <a16:creationId xmlns:a16="http://schemas.microsoft.com/office/drawing/2014/main" id="{173164C6-9C25-284D-72F0-996B38A51057}"/>
+                <a16:creationId xmlns:a16="http://schemas.microsoft.com/office/drawing/2014/main" id="{33D96AC0-B2CC-D2CC-B0B1-78DFE8490301}"/>
               </a:ext>
             </a:extLst>
           </p:cNvPr>
@@ -1526,7 +1526,7 @@
           <p:cNvPr id="3" name="Text Placeholder 2">
             <a:extLst>
               <a:ext uri="{FF2B5EF4-FFF2-40B4-BE49-F238E27FC236}">
-                <a16:creationId xmlns:a16="http://schemas.microsoft.com/office/drawing/2014/main" id="{3ABFFD91-6B22-81BC-AD57-C84A00BC7720}"/>
+                <a16:creationId xmlns:a16="http://schemas.microsoft.com/office/drawing/2014/main" id="{E6A4F1F6-F3AE-060D-7B73-ECCEAAF2113C}"/>
               </a:ext>
             </a:extLst>
           </p:cNvPr>
@@ -1597,7 +1597,7 @@
           <p:cNvPr id="4" name="Content Placeholder 3">
             <a:extLst>
               <a:ext uri="{FF2B5EF4-FFF2-40B4-BE49-F238E27FC236}">
-                <a16:creationId xmlns:a16="http://schemas.microsoft.com/office/drawing/2014/main" id="{9E9E5B38-8057-57CE-29A6-9D943A26D61D}"/>
+                <a16:creationId xmlns:a16="http://schemas.microsoft.com/office/drawing/2014/main" id="{17BD7113-3CF3-5471-8AEB-AC8E70EF51FE}"/>
               </a:ext>
             </a:extLst>
           </p:cNvPr>
@@ -1659,7 +1659,7 @@
           <p:cNvPr id="5" name="Text Placeholder 4">
             <a:extLst>
               <a:ext uri="{FF2B5EF4-FFF2-40B4-BE49-F238E27FC236}">
-                <a16:creationId xmlns:a16="http://schemas.microsoft.com/office/drawing/2014/main" id="{33C42535-C1BF-62FE-9095-570CF4A3462B}"/>
+                <a16:creationId xmlns:a16="http://schemas.microsoft.com/office/drawing/2014/main" id="{094254BE-8216-EC69-7F29-FD8D9A4552E0}"/>
               </a:ext>
             </a:extLst>
           </p:cNvPr>
@@ -1730,7 +1730,7 @@
           <p:cNvPr id="6" name="Content Placeholder 5">
             <a:extLst>
               <a:ext uri="{FF2B5EF4-FFF2-40B4-BE49-F238E27FC236}">
-                <a16:creationId xmlns:a16="http://schemas.microsoft.com/office/drawing/2014/main" id="{8B5ACD02-91AB-117B-A24F-5587D7876AF2}"/>
+                <a16:creationId xmlns:a16="http://schemas.microsoft.com/office/drawing/2014/main" id="{D7E673E3-3604-9745-0CA3-070EDFAB09E5}"/>
               </a:ext>
             </a:extLst>
           </p:cNvPr>
@@ -1792,7 +1792,7 @@
           <p:cNvPr id="7" name="Date Placeholder 6">
             <a:extLst>
               <a:ext uri="{FF2B5EF4-FFF2-40B4-BE49-F238E27FC236}">
-                <a16:creationId xmlns:a16="http://schemas.microsoft.com/office/drawing/2014/main" id="{8B009A82-CC36-6508-5685-D17485847B0C}"/>
+                <a16:creationId xmlns:a16="http://schemas.microsoft.com/office/drawing/2014/main" id="{386CDC86-CE23-9F40-C9C1-9D13BB51FD66}"/>
               </a:ext>
             </a:extLst>
           </p:cNvPr>
@@ -1808,7 +1808,7 @@
           <a:bodyPr/>
           <a:lstStyle/>
           <a:p>
-            <a:fld id="{7DF1436A-1E1C-4383-9E61-1EE8881AACAC}" type="datetimeFigureOut">
+            <a:fld id="{4E4EC354-D508-484A-8B66-80171810EB59}" type="datetimeFigureOut">
               <a:rPr lang="en-US" smtClean="0"/>
               <a:t>5/14/2026</a:t>
             </a:fld>
@@ -1821,7 +1821,7 @@
           <p:cNvPr id="8" name="Footer Placeholder 7">
             <a:extLst>
               <a:ext uri="{FF2B5EF4-FFF2-40B4-BE49-F238E27FC236}">
-                <a16:creationId xmlns:a16="http://schemas.microsoft.com/office/drawing/2014/main" id="{A57561C6-F764-E041-032A-14EDE7ACC7BB}"/>
+                <a16:creationId xmlns:a16="http://schemas.microsoft.com/office/drawing/2014/main" id="{CD5FA40D-C6B2-AB6D-3563-1F1F06B00639}"/>
               </a:ext>
             </a:extLst>
           </p:cNvPr>
@@ -1846,7 +1846,7 @@
           <p:cNvPr id="9" name="Slide Number Placeholder 8">
             <a:extLst>
               <a:ext uri="{FF2B5EF4-FFF2-40B4-BE49-F238E27FC236}">
-                <a16:creationId xmlns:a16="http://schemas.microsoft.com/office/drawing/2014/main" id="{146C3888-4375-F479-C6F3-672C9F5F8CDB}"/>
+                <a16:creationId xmlns:a16="http://schemas.microsoft.com/office/drawing/2014/main" id="{76704FB0-5FFC-ACE1-74F2-D81127F73A97}"/>
               </a:ext>
             </a:extLst>
           </p:cNvPr>
@@ -1862,7 +1862,7 @@
           <a:bodyPr/>
           <a:lstStyle/>
           <a:p>
-            <a:fld id="{FD46D3FB-4AB5-428B-AF3F-D4DE3466D970}" type="slidenum">
+            <a:fld id="{F4E5DC8E-D136-45D7-A9C1-2A7416A8FD7F}" type="slidenum">
               <a:rPr lang="en-US" smtClean="0"/>
               <a:t>‹#›</a:t>
             </a:fld>
@@ -1873,7 +1873,7 @@
     </p:spTree>
     <p:extLst>
       <p:ext uri="{BB962C8B-B14F-4D97-AF65-F5344CB8AC3E}">
-        <p14:creationId xmlns:p14="http://schemas.microsoft.com/office/powerpoint/2010/main" val="2246288189"/>
+        <p14:creationId xmlns:p14="http://schemas.microsoft.com/office/powerpoint/2010/main" val="1129415494"/>
       </p:ext>
     </p:extLst>
   </p:cSld>
@@ -1905,7 +1905,7 @@
           <p:cNvPr id="2" name="Title 1">
             <a:extLst>
               <a:ext uri="{FF2B5EF4-FFF2-40B4-BE49-F238E27FC236}">
-                <a16:creationId xmlns:a16="http://schemas.microsoft.com/office/drawing/2014/main" id="{016EC86F-EF2C-AD0F-3F0F-BE213EBE1187}"/>
+                <a16:creationId xmlns:a16="http://schemas.microsoft.com/office/drawing/2014/main" id="{C8B7546E-3043-A6EB-ACE5-0C06C26D6D7E}"/>
               </a:ext>
             </a:extLst>
           </p:cNvPr>
@@ -1933,7 +1933,7 @@
           <p:cNvPr id="3" name="Date Placeholder 2">
             <a:extLst>
               <a:ext uri="{FF2B5EF4-FFF2-40B4-BE49-F238E27FC236}">
-                <a16:creationId xmlns:a16="http://schemas.microsoft.com/office/drawing/2014/main" id="{53E948FB-497C-316D-968B-648AB30E3731}"/>
+                <a16:creationId xmlns:a16="http://schemas.microsoft.com/office/drawing/2014/main" id="{FE212220-5290-CBB1-AFA9-34CFA5F0D245}"/>
               </a:ext>
             </a:extLst>
           </p:cNvPr>
@@ -1949,7 +1949,7 @@
           <a:bodyPr/>
           <a:lstStyle/>
           <a:p>
-            <a:fld id="{7DF1436A-1E1C-4383-9E61-1EE8881AACAC}" type="datetimeFigureOut">
+            <a:fld id="{4E4EC354-D508-484A-8B66-80171810EB59}" type="datetimeFigureOut">
               <a:rPr lang="en-US" smtClean="0"/>
               <a:t>5/14/2026</a:t>
             </a:fld>
@@ -1962,7 +1962,7 @@
           <p:cNvPr id="4" name="Footer Placeholder 3">
             <a:extLst>
               <a:ext uri="{FF2B5EF4-FFF2-40B4-BE49-F238E27FC236}">
-                <a16:creationId xmlns:a16="http://schemas.microsoft.com/office/drawing/2014/main" id="{D62FC13C-298D-540A-A3E3-96146F053FAC}"/>
+                <a16:creationId xmlns:a16="http://schemas.microsoft.com/office/drawing/2014/main" id="{4F6ACAD1-C8CC-57BC-5892-E5B89C014D7F}"/>
               </a:ext>
             </a:extLst>
           </p:cNvPr>
@@ -1987,7 +1987,7 @@
           <p:cNvPr id="5" name="Slide Number Placeholder 4">
             <a:extLst>
               <a:ext uri="{FF2B5EF4-FFF2-40B4-BE49-F238E27FC236}">
-                <a16:creationId xmlns:a16="http://schemas.microsoft.com/office/drawing/2014/main" id="{E3A16585-9064-9A67-9EA7-700F03054A4E}"/>
+                <a16:creationId xmlns:a16="http://schemas.microsoft.com/office/drawing/2014/main" id="{99137E56-86F5-8750-EA76-90048E0F1D2D}"/>
               </a:ext>
             </a:extLst>
           </p:cNvPr>
@@ -2003,7 +2003,7 @@
           <a:bodyPr/>
           <a:lstStyle/>
           <a:p>
-            <a:fld id="{FD46D3FB-4AB5-428B-AF3F-D4DE3466D970}" type="slidenum">
+            <a:fld id="{F4E5DC8E-D136-45D7-A9C1-2A7416A8FD7F}" type="slidenum">
               <a:rPr lang="en-US" smtClean="0"/>
               <a:t>‹#›</a:t>
             </a:fld>
@@ -2014,7 +2014,7 @@
     </p:spTree>
     <p:extLst>
       <p:ext uri="{BB962C8B-B14F-4D97-AF65-F5344CB8AC3E}">
-        <p14:creationId xmlns:p14="http://schemas.microsoft.com/office/powerpoint/2010/main" val="3951207592"/>
+        <p14:creationId xmlns:p14="http://schemas.microsoft.com/office/powerpoint/2010/main" val="2938515792"/>
       </p:ext>
     </p:extLst>
   </p:cSld>
@@ -2046,7 +2046,7 @@
           <p:cNvPr id="2" name="Date Placeholder 1">
             <a:extLst>
               <a:ext uri="{FF2B5EF4-FFF2-40B4-BE49-F238E27FC236}">
-                <a16:creationId xmlns:a16="http://schemas.microsoft.com/office/drawing/2014/main" id="{CE4C2F22-C8DD-AA5C-3635-F23EDBCB6728}"/>
+                <a16:creationId xmlns:a16="http://schemas.microsoft.com/office/drawing/2014/main" id="{541E7A77-C4D1-077F-EA25-7E9E32725F23}"/>
               </a:ext>
             </a:extLst>
           </p:cNvPr>
@@ -2062,7 +2062,7 @@
           <a:bodyPr/>
           <a:lstStyle/>
           <a:p>
-            <a:fld id="{7DF1436A-1E1C-4383-9E61-1EE8881AACAC}" type="datetimeFigureOut">
+            <a:fld id="{4E4EC354-D508-484A-8B66-80171810EB59}" type="datetimeFigureOut">
               <a:rPr lang="en-US" smtClean="0"/>
               <a:t>5/14/2026</a:t>
             </a:fld>
@@ -2075,7 +2075,7 @@
           <p:cNvPr id="3" name="Footer Placeholder 2">
             <a:extLst>
               <a:ext uri="{FF2B5EF4-FFF2-40B4-BE49-F238E27FC236}">
-                <a16:creationId xmlns:a16="http://schemas.microsoft.com/office/drawing/2014/main" id="{EB87D5B4-94CF-D93F-0311-7E91A4303927}"/>
+                <a16:creationId xmlns:a16="http://schemas.microsoft.com/office/drawing/2014/main" id="{E63979E9-E2D9-92EE-A10F-DCCB11553B8A}"/>
               </a:ext>
             </a:extLst>
           </p:cNvPr>
@@ -2100,7 +2100,7 @@
           <p:cNvPr id="4" name="Slide Number Placeholder 3">
             <a:extLst>
               <a:ext uri="{FF2B5EF4-FFF2-40B4-BE49-F238E27FC236}">
-                <a16:creationId xmlns:a16="http://schemas.microsoft.com/office/drawing/2014/main" id="{6A697EF6-C131-7214-9C59-32BA87D6FCD5}"/>
+                <a16:creationId xmlns:a16="http://schemas.microsoft.com/office/drawing/2014/main" id="{8B8B8FEE-D540-6D49-BD50-3C521986532E}"/>
               </a:ext>
             </a:extLst>
           </p:cNvPr>
@@ -2116,7 +2116,7 @@
           <a:bodyPr/>
           <a:lstStyle/>
           <a:p>
-            <a:fld id="{FD46D3FB-4AB5-428B-AF3F-D4DE3466D970}" type="slidenum">
+            <a:fld id="{F4E5DC8E-D136-45D7-A9C1-2A7416A8FD7F}" type="slidenum">
               <a:rPr lang="en-US" smtClean="0"/>
               <a:t>‹#›</a:t>
             </a:fld>
@@ -2127,7 +2127,7 @@
     </p:spTree>
     <p:extLst>
       <p:ext uri="{BB962C8B-B14F-4D97-AF65-F5344CB8AC3E}">
-        <p14:creationId xmlns:p14="http://schemas.microsoft.com/office/powerpoint/2010/main" val="3980961958"/>
+        <p14:creationId xmlns:p14="http://schemas.microsoft.com/office/powerpoint/2010/main" val="3043502280"/>
       </p:ext>
     </p:extLst>
   </p:cSld>
@@ -2159,7 +2159,7 @@
           <p:cNvPr id="2" name="Title 1">
             <a:extLst>
               <a:ext uri="{FF2B5EF4-FFF2-40B4-BE49-F238E27FC236}">
-                <a16:creationId xmlns:a16="http://schemas.microsoft.com/office/drawing/2014/main" id="{E71AD2F8-FA2F-CF0E-208F-B2F7EDF37DFE}"/>
+                <a16:creationId xmlns:a16="http://schemas.microsoft.com/office/drawing/2014/main" id="{D3480D09-7A88-DB6C-576A-ABE9AA23C6AE}"/>
               </a:ext>
             </a:extLst>
           </p:cNvPr>
@@ -2196,7 +2196,7 @@
           <p:cNvPr id="3" name="Content Placeholder 2">
             <a:extLst>
               <a:ext uri="{FF2B5EF4-FFF2-40B4-BE49-F238E27FC236}">
-                <a16:creationId xmlns:a16="http://schemas.microsoft.com/office/drawing/2014/main" id="{D441602D-BB37-71E2-5376-A2245197E2C8}"/>
+                <a16:creationId xmlns:a16="http://schemas.microsoft.com/office/drawing/2014/main" id="{D392418A-F90F-A984-2A4B-ECCC86F9FDB0}"/>
               </a:ext>
             </a:extLst>
           </p:cNvPr>
@@ -2286,7 +2286,7 @@
           <p:cNvPr id="4" name="Text Placeholder 3">
             <a:extLst>
               <a:ext uri="{FF2B5EF4-FFF2-40B4-BE49-F238E27FC236}">
-                <a16:creationId xmlns:a16="http://schemas.microsoft.com/office/drawing/2014/main" id="{D63E85E8-613F-CC0A-270B-AE35C31BD7DA}"/>
+                <a16:creationId xmlns:a16="http://schemas.microsoft.com/office/drawing/2014/main" id="{CA51E745-1CF7-1C17-72B6-CF7FC75D4394}"/>
               </a:ext>
             </a:extLst>
           </p:cNvPr>
@@ -2357,7 +2357,7 @@
           <p:cNvPr id="5" name="Date Placeholder 4">
             <a:extLst>
               <a:ext uri="{FF2B5EF4-FFF2-40B4-BE49-F238E27FC236}">
-                <a16:creationId xmlns:a16="http://schemas.microsoft.com/office/drawing/2014/main" id="{D24A8E5F-E8DC-5A50-0567-DD49EF694D27}"/>
+                <a16:creationId xmlns:a16="http://schemas.microsoft.com/office/drawing/2014/main" id="{02475765-B778-4495-8D23-F4593F6FF172}"/>
               </a:ext>
             </a:extLst>
           </p:cNvPr>
@@ -2373,7 +2373,7 @@
           <a:bodyPr/>
           <a:lstStyle/>
           <a:p>
-            <a:fld id="{7DF1436A-1E1C-4383-9E61-1EE8881AACAC}" type="datetimeFigureOut">
+            <a:fld id="{4E4EC354-D508-484A-8B66-80171810EB59}" type="datetimeFigureOut">
               <a:rPr lang="en-US" smtClean="0"/>
               <a:t>5/14/2026</a:t>
             </a:fld>
@@ -2386,7 +2386,7 @@
           <p:cNvPr id="6" name="Footer Placeholder 5">
             <a:extLst>
               <a:ext uri="{FF2B5EF4-FFF2-40B4-BE49-F238E27FC236}">
-                <a16:creationId xmlns:a16="http://schemas.microsoft.com/office/drawing/2014/main" id="{17E15664-F8E5-768F-8759-219DEB6693F2}"/>
+                <a16:creationId xmlns:a16="http://schemas.microsoft.com/office/drawing/2014/main" id="{9FF34490-5EBB-E639-F289-32CBBC783746}"/>
               </a:ext>
             </a:extLst>
           </p:cNvPr>
@@ -2411,7 +2411,7 @@
           <p:cNvPr id="7" name="Slide Number Placeholder 6">
             <a:extLst>
               <a:ext uri="{FF2B5EF4-FFF2-40B4-BE49-F238E27FC236}">
-                <a16:creationId xmlns:a16="http://schemas.microsoft.com/office/drawing/2014/main" id="{FFEFA92E-7F53-3B76-C988-E19BAE56A23B}"/>
+                <a16:creationId xmlns:a16="http://schemas.microsoft.com/office/drawing/2014/main" id="{86DE79AA-5096-81D0-E7A4-5C2122BBADC1}"/>
               </a:ext>
             </a:extLst>
           </p:cNvPr>
@@ -2427,7 +2427,7 @@
           <a:bodyPr/>
           <a:lstStyle/>
           <a:p>
-            <a:fld id="{FD46D3FB-4AB5-428B-AF3F-D4DE3466D970}" type="slidenum">
+            <a:fld id="{F4E5DC8E-D136-45D7-A9C1-2A7416A8FD7F}" type="slidenum">
               <a:rPr lang="en-US" smtClean="0"/>
               <a:t>‹#›</a:t>
             </a:fld>
@@ -2438,7 +2438,7 @@
     </p:spTree>
     <p:extLst>
       <p:ext uri="{BB962C8B-B14F-4D97-AF65-F5344CB8AC3E}">
-        <p14:creationId xmlns:p14="http://schemas.microsoft.com/office/powerpoint/2010/main" val="2803660262"/>
+        <p14:creationId xmlns:p14="http://schemas.microsoft.com/office/powerpoint/2010/main" val="1451776616"/>
       </p:ext>
     </p:extLst>
   </p:cSld>
@@ -2470,7 +2470,7 @@
           <p:cNvPr id="2" name="Title 1">
             <a:extLst>
               <a:ext uri="{FF2B5EF4-FFF2-40B4-BE49-F238E27FC236}">
-                <a16:creationId xmlns:a16="http://schemas.microsoft.com/office/drawing/2014/main" id="{CBB5EB38-6AD7-5D0F-6E1A-8610B78A4754}"/>
+                <a16:creationId xmlns:a16="http://schemas.microsoft.com/office/drawing/2014/main" id="{828EEF37-A3B0-9299-000D-8E9E40290282}"/>
               </a:ext>
             </a:extLst>
           </p:cNvPr>
@@ -2507,7 +2507,7 @@
           <p:cNvPr id="3" name="Picture Placeholder 2">
             <a:extLst>
               <a:ext uri="{FF2B5EF4-FFF2-40B4-BE49-F238E27FC236}">
-                <a16:creationId xmlns:a16="http://schemas.microsoft.com/office/drawing/2014/main" id="{9160A614-572E-2F78-CAC4-68630FCB97FA}"/>
+                <a16:creationId xmlns:a16="http://schemas.microsoft.com/office/drawing/2014/main" id="{1A679B65-A680-8A80-D661-095B4DE16C2C}"/>
               </a:ext>
             </a:extLst>
           </p:cNvPr>
@@ -2574,7 +2574,7 @@
           <p:cNvPr id="4" name="Text Placeholder 3">
             <a:extLst>
               <a:ext uri="{FF2B5EF4-FFF2-40B4-BE49-F238E27FC236}">
-                <a16:creationId xmlns:a16="http://schemas.microsoft.com/office/drawing/2014/main" id="{D431AB45-D3E4-9E05-C829-786C43016B8D}"/>
+                <a16:creationId xmlns:a16="http://schemas.microsoft.com/office/drawing/2014/main" id="{BCD5D8F6-44E9-034A-AD81-A860EA387FA3}"/>
               </a:ext>
             </a:extLst>
           </p:cNvPr>
@@ -2645,7 +2645,7 @@
           <p:cNvPr id="5" name="Date Placeholder 4">
             <a:extLst>
               <a:ext uri="{FF2B5EF4-FFF2-40B4-BE49-F238E27FC236}">
-                <a16:creationId xmlns:a16="http://schemas.microsoft.com/office/drawing/2014/main" id="{3F3C649A-D347-3CB8-53B7-30A730F64CF8}"/>
+                <a16:creationId xmlns:a16="http://schemas.microsoft.com/office/drawing/2014/main" id="{B438E07D-D403-F6C6-24C2-A6792CCFAD27}"/>
               </a:ext>
             </a:extLst>
           </p:cNvPr>
@@ -2661,7 +2661,7 @@
           <a:bodyPr/>
           <a:lstStyle/>
           <a:p>
-            <a:fld id="{7DF1436A-1E1C-4383-9E61-1EE8881AACAC}" type="datetimeFigureOut">
+            <a:fld id="{4E4EC354-D508-484A-8B66-80171810EB59}" type="datetimeFigureOut">
               <a:rPr lang="en-US" smtClean="0"/>
               <a:t>5/14/2026</a:t>
             </a:fld>
@@ -2674,7 +2674,7 @@
           <p:cNvPr id="6" name="Footer Placeholder 5">
             <a:extLst>
               <a:ext uri="{FF2B5EF4-FFF2-40B4-BE49-F238E27FC236}">
-                <a16:creationId xmlns:a16="http://schemas.microsoft.com/office/drawing/2014/main" id="{22BA25FE-0E3B-A90C-586B-9FC1F0A91180}"/>
+                <a16:creationId xmlns:a16="http://schemas.microsoft.com/office/drawing/2014/main" id="{29AB05F1-BCD5-99BE-1A88-4FCF2DC7AB5D}"/>
               </a:ext>
             </a:extLst>
           </p:cNvPr>
@@ -2699,7 +2699,7 @@
           <p:cNvPr id="7" name="Slide Number Placeholder 6">
             <a:extLst>
               <a:ext uri="{FF2B5EF4-FFF2-40B4-BE49-F238E27FC236}">
-                <a16:creationId xmlns:a16="http://schemas.microsoft.com/office/drawing/2014/main" id="{2B9734BC-CC19-2FAF-9CFD-61E9DEC9DDA9}"/>
+                <a16:creationId xmlns:a16="http://schemas.microsoft.com/office/drawing/2014/main" id="{548B7A21-3CD9-837A-DE90-9B35A60C17B3}"/>
               </a:ext>
             </a:extLst>
           </p:cNvPr>
@@ -2715,7 +2715,7 @@
           <a:bodyPr/>
           <a:lstStyle/>
           <a:p>
-            <a:fld id="{FD46D3FB-4AB5-428B-AF3F-D4DE3466D970}" type="slidenum">
+            <a:fld id="{F4E5DC8E-D136-45D7-A9C1-2A7416A8FD7F}" type="slidenum">
               <a:rPr lang="en-US" smtClean="0"/>
               <a:t>‹#›</a:t>
             </a:fld>
@@ -2726,7 +2726,7 @@
     </p:spTree>
     <p:extLst>
       <p:ext uri="{BB962C8B-B14F-4D97-AF65-F5344CB8AC3E}">
-        <p14:creationId xmlns:p14="http://schemas.microsoft.com/office/powerpoint/2010/main" val="3490030064"/>
+        <p14:creationId xmlns:p14="http://schemas.microsoft.com/office/powerpoint/2010/main" val="1399129244"/>
       </p:ext>
     </p:extLst>
   </p:cSld>
@@ -2763,7 +2763,7 @@
           <p:cNvPr id="2" name="Title Placeholder 1">
             <a:extLst>
               <a:ext uri="{FF2B5EF4-FFF2-40B4-BE49-F238E27FC236}">
-                <a16:creationId xmlns:a16="http://schemas.microsoft.com/office/drawing/2014/main" id="{0149DDAC-E74B-1C7E-43FA-4D755AE708B4}"/>
+                <a16:creationId xmlns:a16="http://schemas.microsoft.com/office/drawing/2014/main" id="{C6485BFC-CEA3-FA7A-62C5-2F0F087930E4}"/>
               </a:ext>
             </a:extLst>
           </p:cNvPr>
@@ -2801,7 +2801,7 @@
           <p:cNvPr id="3" name="Text Placeholder 2">
             <a:extLst>
               <a:ext uri="{FF2B5EF4-FFF2-40B4-BE49-F238E27FC236}">
-                <a16:creationId xmlns:a16="http://schemas.microsoft.com/office/drawing/2014/main" id="{55270A0F-E3EC-9DE0-004F-067AD29F86C6}"/>
+                <a16:creationId xmlns:a16="http://schemas.microsoft.com/office/drawing/2014/main" id="{102C1716-2E20-661D-03DC-9E074102FB0A}"/>
               </a:ext>
             </a:extLst>
           </p:cNvPr>
@@ -2868,7 +2868,7 @@
           <p:cNvPr id="4" name="Date Placeholder 3">
             <a:extLst>
               <a:ext uri="{FF2B5EF4-FFF2-40B4-BE49-F238E27FC236}">
-                <a16:creationId xmlns:a16="http://schemas.microsoft.com/office/drawing/2014/main" id="{868FA909-17B2-A7ED-0128-A8E13BC8D43A}"/>
+                <a16:creationId xmlns:a16="http://schemas.microsoft.com/office/drawing/2014/main" id="{E3CD383E-33BE-2946-D336-ADD2B0B6618F}"/>
               </a:ext>
             </a:extLst>
           </p:cNvPr>
@@ -2902,7 +2902,7 @@
             </a:lvl1pPr>
           </a:lstStyle>
           <a:p>
-            <a:fld id="{7DF1436A-1E1C-4383-9E61-1EE8881AACAC}" type="datetimeFigureOut">
+            <a:fld id="{4E4EC354-D508-484A-8B66-80171810EB59}" type="datetimeFigureOut">
               <a:rPr lang="en-US" smtClean="0"/>
               <a:t>5/14/2026</a:t>
             </a:fld>
@@ -2915,7 +2915,7 @@
           <p:cNvPr id="5" name="Footer Placeholder 4">
             <a:extLst>
               <a:ext uri="{FF2B5EF4-FFF2-40B4-BE49-F238E27FC236}">
-                <a16:creationId xmlns:a16="http://schemas.microsoft.com/office/drawing/2014/main" id="{88B8B168-E48A-8F80-BC3C-4773FE96B52F}"/>
+                <a16:creationId xmlns:a16="http://schemas.microsoft.com/office/drawing/2014/main" id="{30D17E01-EF06-82F4-37B0-40351E1337DD}"/>
               </a:ext>
             </a:extLst>
           </p:cNvPr>
@@ -2958,7 +2958,7 @@
           <p:cNvPr id="6" name="Slide Number Placeholder 5">
             <a:extLst>
               <a:ext uri="{FF2B5EF4-FFF2-40B4-BE49-F238E27FC236}">
-                <a16:creationId xmlns:a16="http://schemas.microsoft.com/office/drawing/2014/main" id="{983DB965-EDBB-2388-B717-BF836A4A1B67}"/>
+                <a16:creationId xmlns:a16="http://schemas.microsoft.com/office/drawing/2014/main" id="{6D3A618C-D065-91A5-785D-15442894D101}"/>
               </a:ext>
             </a:extLst>
           </p:cNvPr>
@@ -2992,7 +2992,7 @@
             </a:lvl1pPr>
           </a:lstStyle>
           <a:p>
-            <a:fld id="{FD46D3FB-4AB5-428B-AF3F-D4DE3466D970}" type="slidenum">
+            <a:fld id="{F4E5DC8E-D136-45D7-A9C1-2A7416A8FD7F}" type="slidenum">
               <a:rPr lang="en-US" smtClean="0"/>
               <a:t>‹#›</a:t>
             </a:fld>
@@ -3003,7 +3003,7 @@
     </p:spTree>
     <p:extLst>
       <p:ext uri="{BB962C8B-B14F-4D97-AF65-F5344CB8AC3E}">
-        <p14:creationId xmlns:p14="http://schemas.microsoft.com/office/powerpoint/2010/main" val="3617670724"/>
+        <p14:creationId xmlns:p14="http://schemas.microsoft.com/office/powerpoint/2010/main" val="4178374867"/>
       </p:ext>
     </p:extLst>
   </p:cSld>
@@ -3326,7 +3326,7 @@
           <p:cNvPr id="2" name="Rectangle 1">
             <a:extLst>
               <a:ext uri="{FF2B5EF4-FFF2-40B4-BE49-F238E27FC236}">
-                <a16:creationId xmlns:a16="http://schemas.microsoft.com/office/drawing/2014/main" id="{E6D0B0C1-C348-7CDD-9DFA-997087612BF6}"/>
+                <a16:creationId xmlns:a16="http://schemas.microsoft.com/office/drawing/2014/main" id="{46E55173-584E-A750-1F18-6FB756CD43EB}"/>
               </a:ext>
             </a:extLst>
           </p:cNvPr>
@@ -3380,7 +3380,7 @@
           <p:cNvPr id="3" name="Oval 2">
             <a:extLst>
               <a:ext uri="{FF2B5EF4-FFF2-40B4-BE49-F238E27FC236}">
-                <a16:creationId xmlns:a16="http://schemas.microsoft.com/office/drawing/2014/main" id="{87FF9CA1-620D-77B8-89CA-EBD83F31D205}"/>
+                <a16:creationId xmlns:a16="http://schemas.microsoft.com/office/drawing/2014/main" id="{D01BB6F2-A959-8C94-28A9-A299B34C5885}"/>
               </a:ext>
             </a:extLst>
           </p:cNvPr>
@@ -3434,7 +3434,7 @@
           <p:cNvPr id="4" name="Straight Connector 3">
             <a:extLst>
               <a:ext uri="{FF2B5EF4-FFF2-40B4-BE49-F238E27FC236}">
-                <a16:creationId xmlns:a16="http://schemas.microsoft.com/office/drawing/2014/main" id="{0E4344F3-D285-7452-E214-4A482F164867}"/>
+                <a16:creationId xmlns:a16="http://schemas.microsoft.com/office/drawing/2014/main" id="{36D94315-DC53-D356-BDA3-CAAE9F17AEED}"/>
               </a:ext>
             </a:extLst>
           </p:cNvPr>
@@ -3473,7 +3473,7 @@
     </p:spTree>
     <p:extLst>
       <p:ext uri="{BB962C8B-B14F-4D97-AF65-F5344CB8AC3E}">
-        <p14:creationId xmlns:p14="http://schemas.microsoft.com/office/powerpoint/2010/main" val="311196348"/>
+        <p14:creationId xmlns:p14="http://schemas.microsoft.com/office/powerpoint/2010/main" val="2518605780"/>
       </p:ext>
     </p:extLst>
   </p:cSld>

--- a/tests/Lokad.OoxPdf.Tests/Cases/pptx-shapes.pptx
+++ b/tests/Lokad.OoxPdf.Tests/Cases/pptx-shapes.pptx
@@ -129,7 +129,7 @@
           <p:cNvPr id="2" name="Title 1">
             <a:extLst>
               <a:ext uri="{FF2B5EF4-FFF2-40B4-BE49-F238E27FC236}">
-                <a16:creationId xmlns:a16="http://schemas.microsoft.com/office/drawing/2014/main" id="{93155783-9733-6D15-87F3-DE2E956D4B4F}"/>
+                <a16:creationId xmlns:a16="http://schemas.microsoft.com/office/drawing/2014/main" id="{0DD05F10-94D3-DCF2-122E-0BA14FB3FC55}"/>
               </a:ext>
             </a:extLst>
           </p:cNvPr>
@@ -166,7 +166,7 @@
           <p:cNvPr id="3" name="Subtitle 2">
             <a:extLst>
               <a:ext uri="{FF2B5EF4-FFF2-40B4-BE49-F238E27FC236}">
-                <a16:creationId xmlns:a16="http://schemas.microsoft.com/office/drawing/2014/main" id="{B98D22D2-6948-9180-48BF-D300BF940F8D}"/>
+                <a16:creationId xmlns:a16="http://schemas.microsoft.com/office/drawing/2014/main" id="{B1A304D2-F6AE-CAE8-065F-79A7B543B3DB}"/>
               </a:ext>
             </a:extLst>
           </p:cNvPr>
@@ -236,7 +236,7 @@
           <p:cNvPr id="4" name="Date Placeholder 3">
             <a:extLst>
               <a:ext uri="{FF2B5EF4-FFF2-40B4-BE49-F238E27FC236}">
-                <a16:creationId xmlns:a16="http://schemas.microsoft.com/office/drawing/2014/main" id="{20528541-929E-29B8-8E8F-B5A70ABA971C}"/>
+                <a16:creationId xmlns:a16="http://schemas.microsoft.com/office/drawing/2014/main" id="{57661503-B1D5-617A-E9FF-3D1F7A77AA21}"/>
               </a:ext>
             </a:extLst>
           </p:cNvPr>
@@ -252,7 +252,7 @@
           <a:bodyPr/>
           <a:lstStyle/>
           <a:p>
-            <a:fld id="{4E4EC354-D508-484A-8B66-80171810EB59}" type="datetimeFigureOut">
+            <a:fld id="{84F656A8-C1BE-4678-A4AC-3CCE978B5001}" type="datetimeFigureOut">
               <a:rPr lang="en-US" smtClean="0"/>
               <a:t>5/14/2026</a:t>
             </a:fld>
@@ -265,7 +265,7 @@
           <p:cNvPr id="5" name="Footer Placeholder 4">
             <a:extLst>
               <a:ext uri="{FF2B5EF4-FFF2-40B4-BE49-F238E27FC236}">
-                <a16:creationId xmlns:a16="http://schemas.microsoft.com/office/drawing/2014/main" id="{45C0A707-7961-8292-B920-D0F2D77F5E54}"/>
+                <a16:creationId xmlns:a16="http://schemas.microsoft.com/office/drawing/2014/main" id="{7E202941-53F4-1587-2268-32F090FA6B4E}"/>
               </a:ext>
             </a:extLst>
           </p:cNvPr>
@@ -290,7 +290,7 @@
           <p:cNvPr id="6" name="Slide Number Placeholder 5">
             <a:extLst>
               <a:ext uri="{FF2B5EF4-FFF2-40B4-BE49-F238E27FC236}">
-                <a16:creationId xmlns:a16="http://schemas.microsoft.com/office/drawing/2014/main" id="{1BE38E05-E0D6-2526-0485-CA3A050E8A7B}"/>
+                <a16:creationId xmlns:a16="http://schemas.microsoft.com/office/drawing/2014/main" id="{86E2E888-FCB5-E132-706A-7AC2C37DED59}"/>
               </a:ext>
             </a:extLst>
           </p:cNvPr>
@@ -306,7 +306,7 @@
           <a:bodyPr/>
           <a:lstStyle/>
           <a:p>
-            <a:fld id="{F4E5DC8E-D136-45D7-A9C1-2A7416A8FD7F}" type="slidenum">
+            <a:fld id="{16C489A8-74BC-4F21-866D-0E2C8543540C}" type="slidenum">
               <a:rPr lang="en-US" smtClean="0"/>
               <a:t>‹#›</a:t>
             </a:fld>
@@ -317,7 +317,7 @@
     </p:spTree>
     <p:extLst>
       <p:ext uri="{BB962C8B-B14F-4D97-AF65-F5344CB8AC3E}">
-        <p14:creationId xmlns:p14="http://schemas.microsoft.com/office/powerpoint/2010/main" val="840213909"/>
+        <p14:creationId xmlns:p14="http://schemas.microsoft.com/office/powerpoint/2010/main" val="632277901"/>
       </p:ext>
     </p:extLst>
   </p:cSld>
@@ -349,7 +349,7 @@
           <p:cNvPr id="2" name="Title 1">
             <a:extLst>
               <a:ext uri="{FF2B5EF4-FFF2-40B4-BE49-F238E27FC236}">
-                <a16:creationId xmlns:a16="http://schemas.microsoft.com/office/drawing/2014/main" id="{4759887E-FB9D-F313-1968-2973479242DA}"/>
+                <a16:creationId xmlns:a16="http://schemas.microsoft.com/office/drawing/2014/main" id="{ABCF2E77-0E02-41BE-DE96-8590E32E49EC}"/>
               </a:ext>
             </a:extLst>
           </p:cNvPr>
@@ -377,7 +377,7 @@
           <p:cNvPr id="3" name="Vertical Text Placeholder 2">
             <a:extLst>
               <a:ext uri="{FF2B5EF4-FFF2-40B4-BE49-F238E27FC236}">
-                <a16:creationId xmlns:a16="http://schemas.microsoft.com/office/drawing/2014/main" id="{2950485A-6A41-9160-9200-C2FAAD5F1EED}"/>
+                <a16:creationId xmlns:a16="http://schemas.microsoft.com/office/drawing/2014/main" id="{726BB5D4-D4FD-BB2C-D626-EDEDA4D3FE81}"/>
               </a:ext>
             </a:extLst>
           </p:cNvPr>
@@ -434,7 +434,7 @@
           <p:cNvPr id="4" name="Date Placeholder 3">
             <a:extLst>
               <a:ext uri="{FF2B5EF4-FFF2-40B4-BE49-F238E27FC236}">
-                <a16:creationId xmlns:a16="http://schemas.microsoft.com/office/drawing/2014/main" id="{5DA34F83-FE5D-CDBD-3B70-635070DD87FF}"/>
+                <a16:creationId xmlns:a16="http://schemas.microsoft.com/office/drawing/2014/main" id="{F7913B94-D9A7-66F2-4960-B1C6D57BBC5F}"/>
               </a:ext>
             </a:extLst>
           </p:cNvPr>
@@ -450,7 +450,7 @@
           <a:bodyPr/>
           <a:lstStyle/>
           <a:p>
-            <a:fld id="{4E4EC354-D508-484A-8B66-80171810EB59}" type="datetimeFigureOut">
+            <a:fld id="{84F656A8-C1BE-4678-A4AC-3CCE978B5001}" type="datetimeFigureOut">
               <a:rPr lang="en-US" smtClean="0"/>
               <a:t>5/14/2026</a:t>
             </a:fld>
@@ -463,7 +463,7 @@
           <p:cNvPr id="5" name="Footer Placeholder 4">
             <a:extLst>
               <a:ext uri="{FF2B5EF4-FFF2-40B4-BE49-F238E27FC236}">
-                <a16:creationId xmlns:a16="http://schemas.microsoft.com/office/drawing/2014/main" id="{CC0BD521-0072-F923-5532-063FA379F453}"/>
+                <a16:creationId xmlns:a16="http://schemas.microsoft.com/office/drawing/2014/main" id="{A5310624-8F67-3E7D-E05D-AFF34D14EC45}"/>
               </a:ext>
             </a:extLst>
           </p:cNvPr>
@@ -488,7 +488,7 @@
           <p:cNvPr id="6" name="Slide Number Placeholder 5">
             <a:extLst>
               <a:ext uri="{FF2B5EF4-FFF2-40B4-BE49-F238E27FC236}">
-                <a16:creationId xmlns:a16="http://schemas.microsoft.com/office/drawing/2014/main" id="{B1FD004A-8EB7-41A0-378C-2B91A7B16CB5}"/>
+                <a16:creationId xmlns:a16="http://schemas.microsoft.com/office/drawing/2014/main" id="{EE03A1E1-2C6C-327C-2B6F-30DA45D65121}"/>
               </a:ext>
             </a:extLst>
           </p:cNvPr>
@@ -504,7 +504,7 @@
           <a:bodyPr/>
           <a:lstStyle/>
           <a:p>
-            <a:fld id="{F4E5DC8E-D136-45D7-A9C1-2A7416A8FD7F}" type="slidenum">
+            <a:fld id="{16C489A8-74BC-4F21-866D-0E2C8543540C}" type="slidenum">
               <a:rPr lang="en-US" smtClean="0"/>
               <a:t>‹#›</a:t>
             </a:fld>
@@ -515,7 +515,7 @@
     </p:spTree>
     <p:extLst>
       <p:ext uri="{BB962C8B-B14F-4D97-AF65-F5344CB8AC3E}">
-        <p14:creationId xmlns:p14="http://schemas.microsoft.com/office/powerpoint/2010/main" val="2578940274"/>
+        <p14:creationId xmlns:p14="http://schemas.microsoft.com/office/powerpoint/2010/main" val="697559559"/>
       </p:ext>
     </p:extLst>
   </p:cSld>
@@ -547,7 +547,7 @@
           <p:cNvPr id="2" name="Vertical Title 1">
             <a:extLst>
               <a:ext uri="{FF2B5EF4-FFF2-40B4-BE49-F238E27FC236}">
-                <a16:creationId xmlns:a16="http://schemas.microsoft.com/office/drawing/2014/main" id="{B1864460-0E6E-5C3D-524C-6B3539E0F8F5}"/>
+                <a16:creationId xmlns:a16="http://schemas.microsoft.com/office/drawing/2014/main" id="{69610403-793B-87C8-85C5-729F0C7F8119}"/>
               </a:ext>
             </a:extLst>
           </p:cNvPr>
@@ -580,7 +580,7 @@
           <p:cNvPr id="3" name="Vertical Text Placeholder 2">
             <a:extLst>
               <a:ext uri="{FF2B5EF4-FFF2-40B4-BE49-F238E27FC236}">
-                <a16:creationId xmlns:a16="http://schemas.microsoft.com/office/drawing/2014/main" id="{8543F904-8107-06E5-5B7A-528ADB63D711}"/>
+                <a16:creationId xmlns:a16="http://schemas.microsoft.com/office/drawing/2014/main" id="{00EA0454-A55A-E65F-F24B-9D526927FCD5}"/>
               </a:ext>
             </a:extLst>
           </p:cNvPr>
@@ -642,7 +642,7 @@
           <p:cNvPr id="4" name="Date Placeholder 3">
             <a:extLst>
               <a:ext uri="{FF2B5EF4-FFF2-40B4-BE49-F238E27FC236}">
-                <a16:creationId xmlns:a16="http://schemas.microsoft.com/office/drawing/2014/main" id="{234E10F8-0A6E-71C3-0C72-B6898FB7815F}"/>
+                <a16:creationId xmlns:a16="http://schemas.microsoft.com/office/drawing/2014/main" id="{0D3AC1F9-2165-FB00-009E-043939CDCCAD}"/>
               </a:ext>
             </a:extLst>
           </p:cNvPr>
@@ -658,7 +658,7 @@
           <a:bodyPr/>
           <a:lstStyle/>
           <a:p>
-            <a:fld id="{4E4EC354-D508-484A-8B66-80171810EB59}" type="datetimeFigureOut">
+            <a:fld id="{84F656A8-C1BE-4678-A4AC-3CCE978B5001}" type="datetimeFigureOut">
               <a:rPr lang="en-US" smtClean="0"/>
               <a:t>5/14/2026</a:t>
             </a:fld>
@@ -671,7 +671,7 @@
           <p:cNvPr id="5" name="Footer Placeholder 4">
             <a:extLst>
               <a:ext uri="{FF2B5EF4-FFF2-40B4-BE49-F238E27FC236}">
-                <a16:creationId xmlns:a16="http://schemas.microsoft.com/office/drawing/2014/main" id="{26BA3A69-8490-3107-CE12-1514D85ADBCB}"/>
+                <a16:creationId xmlns:a16="http://schemas.microsoft.com/office/drawing/2014/main" id="{8269EC30-E6D3-79A3-D03E-0FDA77979962}"/>
               </a:ext>
             </a:extLst>
           </p:cNvPr>
@@ -696,7 +696,7 @@
           <p:cNvPr id="6" name="Slide Number Placeholder 5">
             <a:extLst>
               <a:ext uri="{FF2B5EF4-FFF2-40B4-BE49-F238E27FC236}">
-                <a16:creationId xmlns:a16="http://schemas.microsoft.com/office/drawing/2014/main" id="{33E9BD07-7F25-FF53-71AA-6AFA06EABFCA}"/>
+                <a16:creationId xmlns:a16="http://schemas.microsoft.com/office/drawing/2014/main" id="{D892611A-1DF6-8340-85C6-0BE538711C80}"/>
               </a:ext>
             </a:extLst>
           </p:cNvPr>
@@ -712,7 +712,7 @@
           <a:bodyPr/>
           <a:lstStyle/>
           <a:p>
-            <a:fld id="{F4E5DC8E-D136-45D7-A9C1-2A7416A8FD7F}" type="slidenum">
+            <a:fld id="{16C489A8-74BC-4F21-866D-0E2C8543540C}" type="slidenum">
               <a:rPr lang="en-US" smtClean="0"/>
               <a:t>‹#›</a:t>
             </a:fld>
@@ -723,7 +723,7 @@
     </p:spTree>
     <p:extLst>
       <p:ext uri="{BB962C8B-B14F-4D97-AF65-F5344CB8AC3E}">
-        <p14:creationId xmlns:p14="http://schemas.microsoft.com/office/powerpoint/2010/main" val="2976460559"/>
+        <p14:creationId xmlns:p14="http://schemas.microsoft.com/office/powerpoint/2010/main" val="14633260"/>
       </p:ext>
     </p:extLst>
   </p:cSld>
@@ -755,7 +755,7 @@
           <p:cNvPr id="2" name="Title 1">
             <a:extLst>
               <a:ext uri="{FF2B5EF4-FFF2-40B4-BE49-F238E27FC236}">
-                <a16:creationId xmlns:a16="http://schemas.microsoft.com/office/drawing/2014/main" id="{6382C9B1-2A18-0F50-D57C-AD7D344EE25F}"/>
+                <a16:creationId xmlns:a16="http://schemas.microsoft.com/office/drawing/2014/main" id="{40759CB8-09C4-2E78-288A-70321AD00376}"/>
               </a:ext>
             </a:extLst>
           </p:cNvPr>
@@ -783,7 +783,7 @@
           <p:cNvPr id="3" name="Content Placeholder 2">
             <a:extLst>
               <a:ext uri="{FF2B5EF4-FFF2-40B4-BE49-F238E27FC236}">
-                <a16:creationId xmlns:a16="http://schemas.microsoft.com/office/drawing/2014/main" id="{83C1E780-3AE5-6E3C-8DD6-9C3417884B45}"/>
+                <a16:creationId xmlns:a16="http://schemas.microsoft.com/office/drawing/2014/main" id="{38D75455-9D32-221B-0964-C578CD8E9A8B}"/>
               </a:ext>
             </a:extLst>
           </p:cNvPr>
@@ -840,7 +840,7 @@
           <p:cNvPr id="4" name="Date Placeholder 3">
             <a:extLst>
               <a:ext uri="{FF2B5EF4-FFF2-40B4-BE49-F238E27FC236}">
-                <a16:creationId xmlns:a16="http://schemas.microsoft.com/office/drawing/2014/main" id="{51B7B163-903B-472F-1E5B-67B2549C92E0}"/>
+                <a16:creationId xmlns:a16="http://schemas.microsoft.com/office/drawing/2014/main" id="{98B72087-1400-882F-F8F4-43D0D2B8BB25}"/>
               </a:ext>
             </a:extLst>
           </p:cNvPr>
@@ -856,7 +856,7 @@
           <a:bodyPr/>
           <a:lstStyle/>
           <a:p>
-            <a:fld id="{4E4EC354-D508-484A-8B66-80171810EB59}" type="datetimeFigureOut">
+            <a:fld id="{84F656A8-C1BE-4678-A4AC-3CCE978B5001}" type="datetimeFigureOut">
               <a:rPr lang="en-US" smtClean="0"/>
               <a:t>5/14/2026</a:t>
             </a:fld>
@@ -869,7 +869,7 @@
           <p:cNvPr id="5" name="Footer Placeholder 4">
             <a:extLst>
               <a:ext uri="{FF2B5EF4-FFF2-40B4-BE49-F238E27FC236}">
-                <a16:creationId xmlns:a16="http://schemas.microsoft.com/office/drawing/2014/main" id="{8FF7ED2E-26FE-E8E1-F9E1-C238407C235B}"/>
+                <a16:creationId xmlns:a16="http://schemas.microsoft.com/office/drawing/2014/main" id="{1E6B52EE-DE87-D26A-1E47-393E4F8FFE0C}"/>
               </a:ext>
             </a:extLst>
           </p:cNvPr>
@@ -894,7 +894,7 @@
           <p:cNvPr id="6" name="Slide Number Placeholder 5">
             <a:extLst>
               <a:ext uri="{FF2B5EF4-FFF2-40B4-BE49-F238E27FC236}">
-                <a16:creationId xmlns:a16="http://schemas.microsoft.com/office/drawing/2014/main" id="{DC303D89-EA5E-0A8E-5C23-2FBD586C6025}"/>
+                <a16:creationId xmlns:a16="http://schemas.microsoft.com/office/drawing/2014/main" id="{1616ADD4-4D58-78DF-9790-BD2F684F00CB}"/>
               </a:ext>
             </a:extLst>
           </p:cNvPr>
@@ -910,7 +910,7 @@
           <a:bodyPr/>
           <a:lstStyle/>
           <a:p>
-            <a:fld id="{F4E5DC8E-D136-45D7-A9C1-2A7416A8FD7F}" type="slidenum">
+            <a:fld id="{16C489A8-74BC-4F21-866D-0E2C8543540C}" type="slidenum">
               <a:rPr lang="en-US" smtClean="0"/>
               <a:t>‹#›</a:t>
             </a:fld>
@@ -921,7 +921,7 @@
     </p:spTree>
     <p:extLst>
       <p:ext uri="{BB962C8B-B14F-4D97-AF65-F5344CB8AC3E}">
-        <p14:creationId xmlns:p14="http://schemas.microsoft.com/office/powerpoint/2010/main" val="2535058859"/>
+        <p14:creationId xmlns:p14="http://schemas.microsoft.com/office/powerpoint/2010/main" val="252142146"/>
       </p:ext>
     </p:extLst>
   </p:cSld>
@@ -953,7 +953,7 @@
           <p:cNvPr id="2" name="Title 1">
             <a:extLst>
               <a:ext uri="{FF2B5EF4-FFF2-40B4-BE49-F238E27FC236}">
-                <a16:creationId xmlns:a16="http://schemas.microsoft.com/office/drawing/2014/main" id="{D796836A-90FB-4CF8-A1BB-2B5CCDE063B9}"/>
+                <a16:creationId xmlns:a16="http://schemas.microsoft.com/office/drawing/2014/main" id="{0DA72E9D-9894-E387-C5D8-1B04BB58EF3A}"/>
               </a:ext>
             </a:extLst>
           </p:cNvPr>
@@ -990,7 +990,7 @@
           <p:cNvPr id="3" name="Text Placeholder 2">
             <a:extLst>
               <a:ext uri="{FF2B5EF4-FFF2-40B4-BE49-F238E27FC236}">
-                <a16:creationId xmlns:a16="http://schemas.microsoft.com/office/drawing/2014/main" id="{F2331C5E-8901-BEB9-8E90-DFD598584EF8}"/>
+                <a16:creationId xmlns:a16="http://schemas.microsoft.com/office/drawing/2014/main" id="{8498AE9E-7C4C-C3AF-5C02-1F890991F9DA}"/>
               </a:ext>
             </a:extLst>
           </p:cNvPr>
@@ -1115,7 +1115,7 @@
           <p:cNvPr id="4" name="Date Placeholder 3">
             <a:extLst>
               <a:ext uri="{FF2B5EF4-FFF2-40B4-BE49-F238E27FC236}">
-                <a16:creationId xmlns:a16="http://schemas.microsoft.com/office/drawing/2014/main" id="{0C2EF1D8-800A-6F19-AEF6-0472C2555482}"/>
+                <a16:creationId xmlns:a16="http://schemas.microsoft.com/office/drawing/2014/main" id="{3E414967-9DB2-4D9E-79DD-EB2CC222CCC1}"/>
               </a:ext>
             </a:extLst>
           </p:cNvPr>
@@ -1131,7 +1131,7 @@
           <a:bodyPr/>
           <a:lstStyle/>
           <a:p>
-            <a:fld id="{4E4EC354-D508-484A-8B66-80171810EB59}" type="datetimeFigureOut">
+            <a:fld id="{84F656A8-C1BE-4678-A4AC-3CCE978B5001}" type="datetimeFigureOut">
               <a:rPr lang="en-US" smtClean="0"/>
               <a:t>5/14/2026</a:t>
             </a:fld>
@@ -1144,7 +1144,7 @@
           <p:cNvPr id="5" name="Footer Placeholder 4">
             <a:extLst>
               <a:ext uri="{FF2B5EF4-FFF2-40B4-BE49-F238E27FC236}">
-                <a16:creationId xmlns:a16="http://schemas.microsoft.com/office/drawing/2014/main" id="{9E0B6002-6E64-81A9-3363-FDF972CB576E}"/>
+                <a16:creationId xmlns:a16="http://schemas.microsoft.com/office/drawing/2014/main" id="{7427A784-DBC5-A284-C7DA-088FF371FE84}"/>
               </a:ext>
             </a:extLst>
           </p:cNvPr>
@@ -1169,7 +1169,7 @@
           <p:cNvPr id="6" name="Slide Number Placeholder 5">
             <a:extLst>
               <a:ext uri="{FF2B5EF4-FFF2-40B4-BE49-F238E27FC236}">
-                <a16:creationId xmlns:a16="http://schemas.microsoft.com/office/drawing/2014/main" id="{4374C19B-D852-055C-3AEC-6213F3D5E9A8}"/>
+                <a16:creationId xmlns:a16="http://schemas.microsoft.com/office/drawing/2014/main" id="{5F4411AD-4B39-F8BE-A7F6-0048B386BE29}"/>
               </a:ext>
             </a:extLst>
           </p:cNvPr>
@@ -1185,7 +1185,7 @@
           <a:bodyPr/>
           <a:lstStyle/>
           <a:p>
-            <a:fld id="{F4E5DC8E-D136-45D7-A9C1-2A7416A8FD7F}" type="slidenum">
+            <a:fld id="{16C489A8-74BC-4F21-866D-0E2C8543540C}" type="slidenum">
               <a:rPr lang="en-US" smtClean="0"/>
               <a:t>‹#›</a:t>
             </a:fld>
@@ -1196,7 +1196,7 @@
     </p:spTree>
     <p:extLst>
       <p:ext uri="{BB962C8B-B14F-4D97-AF65-F5344CB8AC3E}">
-        <p14:creationId xmlns:p14="http://schemas.microsoft.com/office/powerpoint/2010/main" val="1176613558"/>
+        <p14:creationId xmlns:p14="http://schemas.microsoft.com/office/powerpoint/2010/main" val="2994235404"/>
       </p:ext>
     </p:extLst>
   </p:cSld>
@@ -1228,7 +1228,7 @@
           <p:cNvPr id="2" name="Title 1">
             <a:extLst>
               <a:ext uri="{FF2B5EF4-FFF2-40B4-BE49-F238E27FC236}">
-                <a16:creationId xmlns:a16="http://schemas.microsoft.com/office/drawing/2014/main" id="{A70E52C3-7FA3-18BF-891A-9CEAAADBB639}"/>
+                <a16:creationId xmlns:a16="http://schemas.microsoft.com/office/drawing/2014/main" id="{CD2CC072-146A-7F19-8383-AC8B5372C733}"/>
               </a:ext>
             </a:extLst>
           </p:cNvPr>
@@ -1256,7 +1256,7 @@
           <p:cNvPr id="3" name="Content Placeholder 2">
             <a:extLst>
               <a:ext uri="{FF2B5EF4-FFF2-40B4-BE49-F238E27FC236}">
-                <a16:creationId xmlns:a16="http://schemas.microsoft.com/office/drawing/2014/main" id="{85549A37-4C01-14AA-BB72-8C513E5EE356}"/>
+                <a16:creationId xmlns:a16="http://schemas.microsoft.com/office/drawing/2014/main" id="{F7C1BCE7-7CC2-5BA7-37D3-30B9B98BAB0B}"/>
               </a:ext>
             </a:extLst>
           </p:cNvPr>
@@ -1318,7 +1318,7 @@
           <p:cNvPr id="4" name="Content Placeholder 3">
             <a:extLst>
               <a:ext uri="{FF2B5EF4-FFF2-40B4-BE49-F238E27FC236}">
-                <a16:creationId xmlns:a16="http://schemas.microsoft.com/office/drawing/2014/main" id="{230A10B5-5ADB-5C54-5EBC-20A6F6597565}"/>
+                <a16:creationId xmlns:a16="http://schemas.microsoft.com/office/drawing/2014/main" id="{2DF6AAB4-3F9F-D3D7-E771-626FD5800F77}"/>
               </a:ext>
             </a:extLst>
           </p:cNvPr>
@@ -1380,7 +1380,7 @@
           <p:cNvPr id="5" name="Date Placeholder 4">
             <a:extLst>
               <a:ext uri="{FF2B5EF4-FFF2-40B4-BE49-F238E27FC236}">
-                <a16:creationId xmlns:a16="http://schemas.microsoft.com/office/drawing/2014/main" id="{042410F1-CD8D-A771-00EC-45ABA9D92921}"/>
+                <a16:creationId xmlns:a16="http://schemas.microsoft.com/office/drawing/2014/main" id="{599AB5E3-4A7F-3C68-0181-A576F0F7282A}"/>
               </a:ext>
             </a:extLst>
           </p:cNvPr>
@@ -1396,7 +1396,7 @@
           <a:bodyPr/>
           <a:lstStyle/>
           <a:p>
-            <a:fld id="{4E4EC354-D508-484A-8B66-80171810EB59}" type="datetimeFigureOut">
+            <a:fld id="{84F656A8-C1BE-4678-A4AC-3CCE978B5001}" type="datetimeFigureOut">
               <a:rPr lang="en-US" smtClean="0"/>
               <a:t>5/14/2026</a:t>
             </a:fld>
@@ -1409,7 +1409,7 @@
           <p:cNvPr id="6" name="Footer Placeholder 5">
             <a:extLst>
               <a:ext uri="{FF2B5EF4-FFF2-40B4-BE49-F238E27FC236}">
-                <a16:creationId xmlns:a16="http://schemas.microsoft.com/office/drawing/2014/main" id="{37B1CA09-1FB5-09C4-122D-AB52D314A0F2}"/>
+                <a16:creationId xmlns:a16="http://schemas.microsoft.com/office/drawing/2014/main" id="{5963DD29-81E5-3463-7966-1A7EC6531919}"/>
               </a:ext>
             </a:extLst>
           </p:cNvPr>
@@ -1434,7 +1434,7 @@
           <p:cNvPr id="7" name="Slide Number Placeholder 6">
             <a:extLst>
               <a:ext uri="{FF2B5EF4-FFF2-40B4-BE49-F238E27FC236}">
-                <a16:creationId xmlns:a16="http://schemas.microsoft.com/office/drawing/2014/main" id="{7B290F36-948D-BDF7-056A-0C7B17E6FE7D}"/>
+                <a16:creationId xmlns:a16="http://schemas.microsoft.com/office/drawing/2014/main" id="{DCC005D2-F978-CA5A-9358-10E1008321BD}"/>
               </a:ext>
             </a:extLst>
           </p:cNvPr>
@@ -1450,7 +1450,7 @@
           <a:bodyPr/>
           <a:lstStyle/>
           <a:p>
-            <a:fld id="{F4E5DC8E-D136-45D7-A9C1-2A7416A8FD7F}" type="slidenum">
+            <a:fld id="{16C489A8-74BC-4F21-866D-0E2C8543540C}" type="slidenum">
               <a:rPr lang="en-US" smtClean="0"/>
               <a:t>‹#›</a:t>
             </a:fld>
@@ -1461,7 +1461,7 @@
     </p:spTree>
     <p:extLst>
       <p:ext uri="{BB962C8B-B14F-4D97-AF65-F5344CB8AC3E}">
-        <p14:creationId xmlns:p14="http://schemas.microsoft.com/office/powerpoint/2010/main" val="1492155531"/>
+        <p14:creationId xmlns:p14="http://schemas.microsoft.com/office/powerpoint/2010/main" val="1150504648"/>
       </p:ext>
     </p:extLst>
   </p:cSld>
@@ -1493,7 +1493,7 @@
           <p:cNvPr id="2" name="Title 1">
             <a:extLst>
               <a:ext uri="{FF2B5EF4-FFF2-40B4-BE49-F238E27FC236}">
-                <a16:creationId xmlns:a16="http://schemas.microsoft.com/office/drawing/2014/main" id="{33D96AC0-B2CC-D2CC-B0B1-78DFE8490301}"/>
+                <a16:creationId xmlns:a16="http://schemas.microsoft.com/office/drawing/2014/main" id="{46003F13-ED1C-2D49-B270-FC852B1F6D0B}"/>
               </a:ext>
             </a:extLst>
           </p:cNvPr>
@@ -1526,7 +1526,7 @@
           <p:cNvPr id="3" name="Text Placeholder 2">
             <a:extLst>
               <a:ext uri="{FF2B5EF4-FFF2-40B4-BE49-F238E27FC236}">
-                <a16:creationId xmlns:a16="http://schemas.microsoft.com/office/drawing/2014/main" id="{E6A4F1F6-F3AE-060D-7B73-ECCEAAF2113C}"/>
+                <a16:creationId xmlns:a16="http://schemas.microsoft.com/office/drawing/2014/main" id="{35F348B6-B3F8-B243-6136-B1C4EDD5EA1D}"/>
               </a:ext>
             </a:extLst>
           </p:cNvPr>
@@ -1597,7 +1597,7 @@
           <p:cNvPr id="4" name="Content Placeholder 3">
             <a:extLst>
               <a:ext uri="{FF2B5EF4-FFF2-40B4-BE49-F238E27FC236}">
-                <a16:creationId xmlns:a16="http://schemas.microsoft.com/office/drawing/2014/main" id="{17BD7113-3CF3-5471-8AEB-AC8E70EF51FE}"/>
+                <a16:creationId xmlns:a16="http://schemas.microsoft.com/office/drawing/2014/main" id="{02AD6208-77D4-3CD3-DB76-4F32FFBFDF29}"/>
               </a:ext>
             </a:extLst>
           </p:cNvPr>
@@ -1659,7 +1659,7 @@
           <p:cNvPr id="5" name="Text Placeholder 4">
             <a:extLst>
               <a:ext uri="{FF2B5EF4-FFF2-40B4-BE49-F238E27FC236}">
-                <a16:creationId xmlns:a16="http://schemas.microsoft.com/office/drawing/2014/main" id="{094254BE-8216-EC69-7F29-FD8D9A4552E0}"/>
+                <a16:creationId xmlns:a16="http://schemas.microsoft.com/office/drawing/2014/main" id="{D8E9B2B8-9B1E-AB87-67A3-526D995985CE}"/>
               </a:ext>
             </a:extLst>
           </p:cNvPr>
@@ -1730,7 +1730,7 @@
           <p:cNvPr id="6" name="Content Placeholder 5">
             <a:extLst>
               <a:ext uri="{FF2B5EF4-FFF2-40B4-BE49-F238E27FC236}">
-                <a16:creationId xmlns:a16="http://schemas.microsoft.com/office/drawing/2014/main" id="{D7E673E3-3604-9745-0CA3-070EDFAB09E5}"/>
+                <a16:creationId xmlns:a16="http://schemas.microsoft.com/office/drawing/2014/main" id="{C1D7BE76-1541-EE95-7877-70AAA4E3060B}"/>
               </a:ext>
             </a:extLst>
           </p:cNvPr>
@@ -1792,7 +1792,7 @@
           <p:cNvPr id="7" name="Date Placeholder 6">
             <a:extLst>
               <a:ext uri="{FF2B5EF4-FFF2-40B4-BE49-F238E27FC236}">
-                <a16:creationId xmlns:a16="http://schemas.microsoft.com/office/drawing/2014/main" id="{386CDC86-CE23-9F40-C9C1-9D13BB51FD66}"/>
+                <a16:creationId xmlns:a16="http://schemas.microsoft.com/office/drawing/2014/main" id="{B50FA2DB-4F7E-96FD-370E-09A13507D95C}"/>
               </a:ext>
             </a:extLst>
           </p:cNvPr>
@@ -1808,7 +1808,7 @@
           <a:bodyPr/>
           <a:lstStyle/>
           <a:p>
-            <a:fld id="{4E4EC354-D508-484A-8B66-80171810EB59}" type="datetimeFigureOut">
+            <a:fld id="{84F656A8-C1BE-4678-A4AC-3CCE978B5001}" type="datetimeFigureOut">
               <a:rPr lang="en-US" smtClean="0"/>
               <a:t>5/14/2026</a:t>
             </a:fld>
@@ -1821,7 +1821,7 @@
           <p:cNvPr id="8" name="Footer Placeholder 7">
             <a:extLst>
               <a:ext uri="{FF2B5EF4-FFF2-40B4-BE49-F238E27FC236}">
-                <a16:creationId xmlns:a16="http://schemas.microsoft.com/office/drawing/2014/main" id="{CD5FA40D-C6B2-AB6D-3563-1F1F06B00639}"/>
+                <a16:creationId xmlns:a16="http://schemas.microsoft.com/office/drawing/2014/main" id="{1D988209-2C96-7CA8-C0A1-30E50AFDC110}"/>
               </a:ext>
             </a:extLst>
           </p:cNvPr>
@@ -1846,7 +1846,7 @@
           <p:cNvPr id="9" name="Slide Number Placeholder 8">
             <a:extLst>
               <a:ext uri="{FF2B5EF4-FFF2-40B4-BE49-F238E27FC236}">
-                <a16:creationId xmlns:a16="http://schemas.microsoft.com/office/drawing/2014/main" id="{76704FB0-5FFC-ACE1-74F2-D81127F73A97}"/>
+                <a16:creationId xmlns:a16="http://schemas.microsoft.com/office/drawing/2014/main" id="{ED47CF99-2727-AA5F-75EC-98735CC04B6E}"/>
               </a:ext>
             </a:extLst>
           </p:cNvPr>
@@ -1862,7 +1862,7 @@
           <a:bodyPr/>
           <a:lstStyle/>
           <a:p>
-            <a:fld id="{F4E5DC8E-D136-45D7-A9C1-2A7416A8FD7F}" type="slidenum">
+            <a:fld id="{16C489A8-74BC-4F21-866D-0E2C8543540C}" type="slidenum">
               <a:rPr lang="en-US" smtClean="0"/>
               <a:t>‹#›</a:t>
             </a:fld>
@@ -1873,7 +1873,7 @@
     </p:spTree>
     <p:extLst>
       <p:ext uri="{BB962C8B-B14F-4D97-AF65-F5344CB8AC3E}">
-        <p14:creationId xmlns:p14="http://schemas.microsoft.com/office/powerpoint/2010/main" val="1129415494"/>
+        <p14:creationId xmlns:p14="http://schemas.microsoft.com/office/powerpoint/2010/main" val="1932650005"/>
       </p:ext>
     </p:extLst>
   </p:cSld>
@@ -1905,7 +1905,7 @@
           <p:cNvPr id="2" name="Title 1">
             <a:extLst>
               <a:ext uri="{FF2B5EF4-FFF2-40B4-BE49-F238E27FC236}">
-                <a16:creationId xmlns:a16="http://schemas.microsoft.com/office/drawing/2014/main" id="{C8B7546E-3043-A6EB-ACE5-0C06C26D6D7E}"/>
+                <a16:creationId xmlns:a16="http://schemas.microsoft.com/office/drawing/2014/main" id="{166DD882-2BCD-BBD2-EF8A-4DAF31BB651E}"/>
               </a:ext>
             </a:extLst>
           </p:cNvPr>
@@ -1933,7 +1933,7 @@
           <p:cNvPr id="3" name="Date Placeholder 2">
             <a:extLst>
               <a:ext uri="{FF2B5EF4-FFF2-40B4-BE49-F238E27FC236}">
-                <a16:creationId xmlns:a16="http://schemas.microsoft.com/office/drawing/2014/main" id="{FE212220-5290-CBB1-AFA9-34CFA5F0D245}"/>
+                <a16:creationId xmlns:a16="http://schemas.microsoft.com/office/drawing/2014/main" id="{9D653F27-7663-4074-168A-C56921ED3C6B}"/>
               </a:ext>
             </a:extLst>
           </p:cNvPr>
@@ -1949,7 +1949,7 @@
           <a:bodyPr/>
           <a:lstStyle/>
           <a:p>
-            <a:fld id="{4E4EC354-D508-484A-8B66-80171810EB59}" type="datetimeFigureOut">
+            <a:fld id="{84F656A8-C1BE-4678-A4AC-3CCE978B5001}" type="datetimeFigureOut">
               <a:rPr lang="en-US" smtClean="0"/>
               <a:t>5/14/2026</a:t>
             </a:fld>
@@ -1962,7 +1962,7 @@
           <p:cNvPr id="4" name="Footer Placeholder 3">
             <a:extLst>
               <a:ext uri="{FF2B5EF4-FFF2-40B4-BE49-F238E27FC236}">
-                <a16:creationId xmlns:a16="http://schemas.microsoft.com/office/drawing/2014/main" id="{4F6ACAD1-C8CC-57BC-5892-E5B89C014D7F}"/>
+                <a16:creationId xmlns:a16="http://schemas.microsoft.com/office/drawing/2014/main" id="{80649F67-5390-0762-0A94-04BD2849D597}"/>
               </a:ext>
             </a:extLst>
           </p:cNvPr>
@@ -1987,7 +1987,7 @@
           <p:cNvPr id="5" name="Slide Number Placeholder 4">
             <a:extLst>
               <a:ext uri="{FF2B5EF4-FFF2-40B4-BE49-F238E27FC236}">
-                <a16:creationId xmlns:a16="http://schemas.microsoft.com/office/drawing/2014/main" id="{99137E56-86F5-8750-EA76-90048E0F1D2D}"/>
+                <a16:creationId xmlns:a16="http://schemas.microsoft.com/office/drawing/2014/main" id="{DBF9472D-8BBF-53F4-C3AF-FD1173231FCC}"/>
               </a:ext>
             </a:extLst>
           </p:cNvPr>
@@ -2003,7 +2003,7 @@
           <a:bodyPr/>
           <a:lstStyle/>
           <a:p>
-            <a:fld id="{F4E5DC8E-D136-45D7-A9C1-2A7416A8FD7F}" type="slidenum">
+            <a:fld id="{16C489A8-74BC-4F21-866D-0E2C8543540C}" type="slidenum">
               <a:rPr lang="en-US" smtClean="0"/>
               <a:t>‹#›</a:t>
             </a:fld>
@@ -2014,7 +2014,7 @@
     </p:spTree>
     <p:extLst>
       <p:ext uri="{BB962C8B-B14F-4D97-AF65-F5344CB8AC3E}">
-        <p14:creationId xmlns:p14="http://schemas.microsoft.com/office/powerpoint/2010/main" val="2938515792"/>
+        <p14:creationId xmlns:p14="http://schemas.microsoft.com/office/powerpoint/2010/main" val="373989459"/>
       </p:ext>
     </p:extLst>
   </p:cSld>
@@ -2046,7 +2046,7 @@
           <p:cNvPr id="2" name="Date Placeholder 1">
             <a:extLst>
               <a:ext uri="{FF2B5EF4-FFF2-40B4-BE49-F238E27FC236}">
-                <a16:creationId xmlns:a16="http://schemas.microsoft.com/office/drawing/2014/main" id="{541E7A77-C4D1-077F-EA25-7E9E32725F23}"/>
+                <a16:creationId xmlns:a16="http://schemas.microsoft.com/office/drawing/2014/main" id="{4A3345AC-B3AC-69C4-390E-D40D65E20DC2}"/>
               </a:ext>
             </a:extLst>
           </p:cNvPr>
@@ -2062,7 +2062,7 @@
           <a:bodyPr/>
           <a:lstStyle/>
           <a:p>
-            <a:fld id="{4E4EC354-D508-484A-8B66-80171810EB59}" type="datetimeFigureOut">
+            <a:fld id="{84F656A8-C1BE-4678-A4AC-3CCE978B5001}" type="datetimeFigureOut">
               <a:rPr lang="en-US" smtClean="0"/>
               <a:t>5/14/2026</a:t>
             </a:fld>
@@ -2075,7 +2075,7 @@
           <p:cNvPr id="3" name="Footer Placeholder 2">
             <a:extLst>
               <a:ext uri="{FF2B5EF4-FFF2-40B4-BE49-F238E27FC236}">
-                <a16:creationId xmlns:a16="http://schemas.microsoft.com/office/drawing/2014/main" id="{E63979E9-E2D9-92EE-A10F-DCCB11553B8A}"/>
+                <a16:creationId xmlns:a16="http://schemas.microsoft.com/office/drawing/2014/main" id="{5633BF8A-066D-C091-5F63-93B9ABA5D6BE}"/>
               </a:ext>
             </a:extLst>
           </p:cNvPr>
@@ -2100,7 +2100,7 @@
           <p:cNvPr id="4" name="Slide Number Placeholder 3">
             <a:extLst>
               <a:ext uri="{FF2B5EF4-FFF2-40B4-BE49-F238E27FC236}">
-                <a16:creationId xmlns:a16="http://schemas.microsoft.com/office/drawing/2014/main" id="{8B8B8FEE-D540-6D49-BD50-3C521986532E}"/>
+                <a16:creationId xmlns:a16="http://schemas.microsoft.com/office/drawing/2014/main" id="{C258F860-E328-13B9-90FC-F8CAB345B705}"/>
               </a:ext>
             </a:extLst>
           </p:cNvPr>
@@ -2116,7 +2116,7 @@
           <a:bodyPr/>
           <a:lstStyle/>
           <a:p>
-            <a:fld id="{F4E5DC8E-D136-45D7-A9C1-2A7416A8FD7F}" type="slidenum">
+            <a:fld id="{16C489A8-74BC-4F21-866D-0E2C8543540C}" type="slidenum">
               <a:rPr lang="en-US" smtClean="0"/>
               <a:t>‹#›</a:t>
             </a:fld>
@@ -2127,7 +2127,7 @@
     </p:spTree>
     <p:extLst>
       <p:ext uri="{BB962C8B-B14F-4D97-AF65-F5344CB8AC3E}">
-        <p14:creationId xmlns:p14="http://schemas.microsoft.com/office/powerpoint/2010/main" val="3043502280"/>
+        <p14:creationId xmlns:p14="http://schemas.microsoft.com/office/powerpoint/2010/main" val="57529814"/>
       </p:ext>
     </p:extLst>
   </p:cSld>
@@ -2159,7 +2159,7 @@
           <p:cNvPr id="2" name="Title 1">
             <a:extLst>
               <a:ext uri="{FF2B5EF4-FFF2-40B4-BE49-F238E27FC236}">
-                <a16:creationId xmlns:a16="http://schemas.microsoft.com/office/drawing/2014/main" id="{D3480D09-7A88-DB6C-576A-ABE9AA23C6AE}"/>
+                <a16:creationId xmlns:a16="http://schemas.microsoft.com/office/drawing/2014/main" id="{EE3384EB-ED5C-F39D-6C0C-B1D4110884FE}"/>
               </a:ext>
             </a:extLst>
           </p:cNvPr>
@@ -2196,7 +2196,7 @@
           <p:cNvPr id="3" name="Content Placeholder 2">
             <a:extLst>
               <a:ext uri="{FF2B5EF4-FFF2-40B4-BE49-F238E27FC236}">
-                <a16:creationId xmlns:a16="http://schemas.microsoft.com/office/drawing/2014/main" id="{D392418A-F90F-A984-2A4B-ECCC86F9FDB0}"/>
+                <a16:creationId xmlns:a16="http://schemas.microsoft.com/office/drawing/2014/main" id="{92C8C8F0-E789-24A6-3FF8-1746FF766EF9}"/>
               </a:ext>
             </a:extLst>
           </p:cNvPr>
@@ -2286,7 +2286,7 @@
           <p:cNvPr id="4" name="Text Placeholder 3">
             <a:extLst>
               <a:ext uri="{FF2B5EF4-FFF2-40B4-BE49-F238E27FC236}">
-                <a16:creationId xmlns:a16="http://schemas.microsoft.com/office/drawing/2014/main" id="{CA51E745-1CF7-1C17-72B6-CF7FC75D4394}"/>
+                <a16:creationId xmlns:a16="http://schemas.microsoft.com/office/drawing/2014/main" id="{0C96DA9F-5985-8D00-23D5-776CEAD85233}"/>
               </a:ext>
             </a:extLst>
           </p:cNvPr>
@@ -2357,7 +2357,7 @@
           <p:cNvPr id="5" name="Date Placeholder 4">
             <a:extLst>
               <a:ext uri="{FF2B5EF4-FFF2-40B4-BE49-F238E27FC236}">
-                <a16:creationId xmlns:a16="http://schemas.microsoft.com/office/drawing/2014/main" id="{02475765-B778-4495-8D23-F4593F6FF172}"/>
+                <a16:creationId xmlns:a16="http://schemas.microsoft.com/office/drawing/2014/main" id="{FEA47855-D4C9-B7DD-DB3B-F78FF2F58836}"/>
               </a:ext>
             </a:extLst>
           </p:cNvPr>
@@ -2373,7 +2373,7 @@
           <a:bodyPr/>
           <a:lstStyle/>
           <a:p>
-            <a:fld id="{4E4EC354-D508-484A-8B66-80171810EB59}" type="datetimeFigureOut">
+            <a:fld id="{84F656A8-C1BE-4678-A4AC-3CCE978B5001}" type="datetimeFigureOut">
               <a:rPr lang="en-US" smtClean="0"/>
               <a:t>5/14/2026</a:t>
             </a:fld>
@@ -2386,7 +2386,7 @@
           <p:cNvPr id="6" name="Footer Placeholder 5">
             <a:extLst>
               <a:ext uri="{FF2B5EF4-FFF2-40B4-BE49-F238E27FC236}">
-                <a16:creationId xmlns:a16="http://schemas.microsoft.com/office/drawing/2014/main" id="{9FF34490-5EBB-E639-F289-32CBBC783746}"/>
+                <a16:creationId xmlns:a16="http://schemas.microsoft.com/office/drawing/2014/main" id="{06EC5019-9DC8-9A71-66BD-BB69F8466C28}"/>
               </a:ext>
             </a:extLst>
           </p:cNvPr>
@@ -2411,7 +2411,7 @@
           <p:cNvPr id="7" name="Slide Number Placeholder 6">
             <a:extLst>
               <a:ext uri="{FF2B5EF4-FFF2-40B4-BE49-F238E27FC236}">
-                <a16:creationId xmlns:a16="http://schemas.microsoft.com/office/drawing/2014/main" id="{86DE79AA-5096-81D0-E7A4-5C2122BBADC1}"/>
+                <a16:creationId xmlns:a16="http://schemas.microsoft.com/office/drawing/2014/main" id="{BF429B7B-13E7-421C-F91C-17A7B99FC47E}"/>
               </a:ext>
             </a:extLst>
           </p:cNvPr>
@@ -2427,7 +2427,7 @@
           <a:bodyPr/>
           <a:lstStyle/>
           <a:p>
-            <a:fld id="{F4E5DC8E-D136-45D7-A9C1-2A7416A8FD7F}" type="slidenum">
+            <a:fld id="{16C489A8-74BC-4F21-866D-0E2C8543540C}" type="slidenum">
               <a:rPr lang="en-US" smtClean="0"/>
               <a:t>‹#›</a:t>
             </a:fld>
@@ -2438,7 +2438,7 @@
     </p:spTree>
     <p:extLst>
       <p:ext uri="{BB962C8B-B14F-4D97-AF65-F5344CB8AC3E}">
-        <p14:creationId xmlns:p14="http://schemas.microsoft.com/office/powerpoint/2010/main" val="1451776616"/>
+        <p14:creationId xmlns:p14="http://schemas.microsoft.com/office/powerpoint/2010/main" val="2680462363"/>
       </p:ext>
     </p:extLst>
   </p:cSld>
@@ -2470,7 +2470,7 @@
           <p:cNvPr id="2" name="Title 1">
             <a:extLst>
               <a:ext uri="{FF2B5EF4-FFF2-40B4-BE49-F238E27FC236}">
-                <a16:creationId xmlns:a16="http://schemas.microsoft.com/office/drawing/2014/main" id="{828EEF37-A3B0-9299-000D-8E9E40290282}"/>
+                <a16:creationId xmlns:a16="http://schemas.microsoft.com/office/drawing/2014/main" id="{0DD053BD-6BA2-5ADF-B143-00F71FE88F3A}"/>
               </a:ext>
             </a:extLst>
           </p:cNvPr>
@@ -2507,7 +2507,7 @@
           <p:cNvPr id="3" name="Picture Placeholder 2">
             <a:extLst>
               <a:ext uri="{FF2B5EF4-FFF2-40B4-BE49-F238E27FC236}">
-                <a16:creationId xmlns:a16="http://schemas.microsoft.com/office/drawing/2014/main" id="{1A679B65-A680-8A80-D661-095B4DE16C2C}"/>
+                <a16:creationId xmlns:a16="http://schemas.microsoft.com/office/drawing/2014/main" id="{0DE96397-C535-C191-2878-65C658A9C3CE}"/>
               </a:ext>
             </a:extLst>
           </p:cNvPr>
@@ -2574,7 +2574,7 @@
           <p:cNvPr id="4" name="Text Placeholder 3">
             <a:extLst>
               <a:ext uri="{FF2B5EF4-FFF2-40B4-BE49-F238E27FC236}">
-                <a16:creationId xmlns:a16="http://schemas.microsoft.com/office/drawing/2014/main" id="{BCD5D8F6-44E9-034A-AD81-A860EA387FA3}"/>
+                <a16:creationId xmlns:a16="http://schemas.microsoft.com/office/drawing/2014/main" id="{EFF7A640-107B-A829-2321-B40021F00A1F}"/>
               </a:ext>
             </a:extLst>
           </p:cNvPr>
@@ -2645,7 +2645,7 @@
           <p:cNvPr id="5" name="Date Placeholder 4">
             <a:extLst>
               <a:ext uri="{FF2B5EF4-FFF2-40B4-BE49-F238E27FC236}">
-                <a16:creationId xmlns:a16="http://schemas.microsoft.com/office/drawing/2014/main" id="{B438E07D-D403-F6C6-24C2-A6792CCFAD27}"/>
+                <a16:creationId xmlns:a16="http://schemas.microsoft.com/office/drawing/2014/main" id="{7664DA33-2B62-8D19-143F-7A76C160CE4B}"/>
               </a:ext>
             </a:extLst>
           </p:cNvPr>
@@ -2661,7 +2661,7 @@
           <a:bodyPr/>
           <a:lstStyle/>
           <a:p>
-            <a:fld id="{4E4EC354-D508-484A-8B66-80171810EB59}" type="datetimeFigureOut">
+            <a:fld id="{84F656A8-C1BE-4678-A4AC-3CCE978B5001}" type="datetimeFigureOut">
               <a:rPr lang="en-US" smtClean="0"/>
               <a:t>5/14/2026</a:t>
             </a:fld>
@@ -2674,7 +2674,7 @@
           <p:cNvPr id="6" name="Footer Placeholder 5">
             <a:extLst>
               <a:ext uri="{FF2B5EF4-FFF2-40B4-BE49-F238E27FC236}">
-                <a16:creationId xmlns:a16="http://schemas.microsoft.com/office/drawing/2014/main" id="{29AB05F1-BCD5-99BE-1A88-4FCF2DC7AB5D}"/>
+                <a16:creationId xmlns:a16="http://schemas.microsoft.com/office/drawing/2014/main" id="{51A3151F-230A-5572-837F-73EB5D8FC63C}"/>
               </a:ext>
             </a:extLst>
           </p:cNvPr>
@@ -2699,7 +2699,7 @@
           <p:cNvPr id="7" name="Slide Number Placeholder 6">
             <a:extLst>
               <a:ext uri="{FF2B5EF4-FFF2-40B4-BE49-F238E27FC236}">
-                <a16:creationId xmlns:a16="http://schemas.microsoft.com/office/drawing/2014/main" id="{548B7A21-3CD9-837A-DE90-9B35A60C17B3}"/>
+                <a16:creationId xmlns:a16="http://schemas.microsoft.com/office/drawing/2014/main" id="{69A7178D-9A3A-4BE0-003F-BF60F5B113F8}"/>
               </a:ext>
             </a:extLst>
           </p:cNvPr>
@@ -2715,7 +2715,7 @@
           <a:bodyPr/>
           <a:lstStyle/>
           <a:p>
-            <a:fld id="{F4E5DC8E-D136-45D7-A9C1-2A7416A8FD7F}" type="slidenum">
+            <a:fld id="{16C489A8-74BC-4F21-866D-0E2C8543540C}" type="slidenum">
               <a:rPr lang="en-US" smtClean="0"/>
               <a:t>‹#›</a:t>
             </a:fld>
@@ -2726,7 +2726,7 @@
     </p:spTree>
     <p:extLst>
       <p:ext uri="{BB962C8B-B14F-4D97-AF65-F5344CB8AC3E}">
-        <p14:creationId xmlns:p14="http://schemas.microsoft.com/office/powerpoint/2010/main" val="1399129244"/>
+        <p14:creationId xmlns:p14="http://schemas.microsoft.com/office/powerpoint/2010/main" val="431168421"/>
       </p:ext>
     </p:extLst>
   </p:cSld>
@@ -2763,7 +2763,7 @@
           <p:cNvPr id="2" name="Title Placeholder 1">
             <a:extLst>
               <a:ext uri="{FF2B5EF4-FFF2-40B4-BE49-F238E27FC236}">
-                <a16:creationId xmlns:a16="http://schemas.microsoft.com/office/drawing/2014/main" id="{C6485BFC-CEA3-FA7A-62C5-2F0F087930E4}"/>
+                <a16:creationId xmlns:a16="http://schemas.microsoft.com/office/drawing/2014/main" id="{E299EAED-4474-9D86-A5D1-ED69B833D495}"/>
               </a:ext>
             </a:extLst>
           </p:cNvPr>
@@ -2801,7 +2801,7 @@
           <p:cNvPr id="3" name="Text Placeholder 2">
             <a:extLst>
               <a:ext uri="{FF2B5EF4-FFF2-40B4-BE49-F238E27FC236}">
-                <a16:creationId xmlns:a16="http://schemas.microsoft.com/office/drawing/2014/main" id="{102C1716-2E20-661D-03DC-9E074102FB0A}"/>
+                <a16:creationId xmlns:a16="http://schemas.microsoft.com/office/drawing/2014/main" id="{35C30F71-92B0-AD02-D4B7-612CF6331959}"/>
               </a:ext>
             </a:extLst>
           </p:cNvPr>
@@ -2868,7 +2868,7 @@
           <p:cNvPr id="4" name="Date Placeholder 3">
             <a:extLst>
               <a:ext uri="{FF2B5EF4-FFF2-40B4-BE49-F238E27FC236}">
-                <a16:creationId xmlns:a16="http://schemas.microsoft.com/office/drawing/2014/main" id="{E3CD383E-33BE-2946-D336-ADD2B0B6618F}"/>
+                <a16:creationId xmlns:a16="http://schemas.microsoft.com/office/drawing/2014/main" id="{1734A38E-A134-34CC-21E0-6D5B4D058CC8}"/>
               </a:ext>
             </a:extLst>
           </p:cNvPr>
@@ -2902,7 +2902,7 @@
             </a:lvl1pPr>
           </a:lstStyle>
           <a:p>
-            <a:fld id="{4E4EC354-D508-484A-8B66-80171810EB59}" type="datetimeFigureOut">
+            <a:fld id="{84F656A8-C1BE-4678-A4AC-3CCE978B5001}" type="datetimeFigureOut">
               <a:rPr lang="en-US" smtClean="0"/>
               <a:t>5/14/2026</a:t>
             </a:fld>
@@ -2915,7 +2915,7 @@
           <p:cNvPr id="5" name="Footer Placeholder 4">
             <a:extLst>
               <a:ext uri="{FF2B5EF4-FFF2-40B4-BE49-F238E27FC236}">
-                <a16:creationId xmlns:a16="http://schemas.microsoft.com/office/drawing/2014/main" id="{30D17E01-EF06-82F4-37B0-40351E1337DD}"/>
+                <a16:creationId xmlns:a16="http://schemas.microsoft.com/office/drawing/2014/main" id="{6F24306C-57BC-C07E-8B90-5D665EFCF084}"/>
               </a:ext>
             </a:extLst>
           </p:cNvPr>
@@ -2958,7 +2958,7 @@
           <p:cNvPr id="6" name="Slide Number Placeholder 5">
             <a:extLst>
               <a:ext uri="{FF2B5EF4-FFF2-40B4-BE49-F238E27FC236}">
-                <a16:creationId xmlns:a16="http://schemas.microsoft.com/office/drawing/2014/main" id="{6D3A618C-D065-91A5-785D-15442894D101}"/>
+                <a16:creationId xmlns:a16="http://schemas.microsoft.com/office/drawing/2014/main" id="{1F94231C-A110-F7FE-9574-D50D899AFE15}"/>
               </a:ext>
             </a:extLst>
           </p:cNvPr>
@@ -2992,7 +2992,7 @@
             </a:lvl1pPr>
           </a:lstStyle>
           <a:p>
-            <a:fld id="{F4E5DC8E-D136-45D7-A9C1-2A7416A8FD7F}" type="slidenum">
+            <a:fld id="{16C489A8-74BC-4F21-866D-0E2C8543540C}" type="slidenum">
               <a:rPr lang="en-US" smtClean="0"/>
               <a:t>‹#›</a:t>
             </a:fld>
@@ -3003,7 +3003,7 @@
     </p:spTree>
     <p:extLst>
       <p:ext uri="{BB962C8B-B14F-4D97-AF65-F5344CB8AC3E}">
-        <p14:creationId xmlns:p14="http://schemas.microsoft.com/office/powerpoint/2010/main" val="4178374867"/>
+        <p14:creationId xmlns:p14="http://schemas.microsoft.com/office/powerpoint/2010/main" val="1721986999"/>
       </p:ext>
     </p:extLst>
   </p:cSld>
@@ -3326,7 +3326,7 @@
           <p:cNvPr id="2" name="Rectangle 1">
             <a:extLst>
               <a:ext uri="{FF2B5EF4-FFF2-40B4-BE49-F238E27FC236}">
-                <a16:creationId xmlns:a16="http://schemas.microsoft.com/office/drawing/2014/main" id="{46E55173-584E-A750-1F18-6FB756CD43EB}"/>
+                <a16:creationId xmlns:a16="http://schemas.microsoft.com/office/drawing/2014/main" id="{D1CC58BB-6DE5-E53C-63AD-950B16A87A31}"/>
               </a:ext>
             </a:extLst>
           </p:cNvPr>
@@ -3380,7 +3380,7 @@
           <p:cNvPr id="3" name="Oval 2">
             <a:extLst>
               <a:ext uri="{FF2B5EF4-FFF2-40B4-BE49-F238E27FC236}">
-                <a16:creationId xmlns:a16="http://schemas.microsoft.com/office/drawing/2014/main" id="{D01BB6F2-A959-8C94-28A9-A299B34C5885}"/>
+                <a16:creationId xmlns:a16="http://schemas.microsoft.com/office/drawing/2014/main" id="{A86DC153-5D6E-C4BF-5B63-8A02F6C245C9}"/>
               </a:ext>
             </a:extLst>
           </p:cNvPr>
@@ -3434,7 +3434,7 @@
           <p:cNvPr id="4" name="Straight Connector 3">
             <a:extLst>
               <a:ext uri="{FF2B5EF4-FFF2-40B4-BE49-F238E27FC236}">
-                <a16:creationId xmlns:a16="http://schemas.microsoft.com/office/drawing/2014/main" id="{36D94315-DC53-D356-BDA3-CAAE9F17AEED}"/>
+                <a16:creationId xmlns:a16="http://schemas.microsoft.com/office/drawing/2014/main" id="{D50ECF15-E9EA-E720-9C14-997711E9D616}"/>
               </a:ext>
             </a:extLst>
           </p:cNvPr>
@@ -3473,7 +3473,7 @@
     </p:spTree>
     <p:extLst>
       <p:ext uri="{BB962C8B-B14F-4D97-AF65-F5344CB8AC3E}">
-        <p14:creationId xmlns:p14="http://schemas.microsoft.com/office/powerpoint/2010/main" val="2518605780"/>
+        <p14:creationId xmlns:p14="http://schemas.microsoft.com/office/powerpoint/2010/main" val="2101182584"/>
       </p:ext>
     </p:extLst>
   </p:cSld>
